--- a/Internship/Effect of Localized Rotation Errors on the Deutsch–Jozsa Algorithm.pptx
+++ b/Internship/Effect of Localized Rotation Errors on the Deutsch–Jozsa Algorithm.pptx
@@ -6561,7 +6561,7 @@
               </a:defRPr>
             </a:pPr>
             <a:r>
-              <a:rPr sz="900" b="1" i="0">
+              <a:rPr sz="900" b="1" i="0" dirty="0">
                 <a:solidFill>
                   <a:srgbClr val="3B82F6"/>
                 </a:solidFill>
@@ -6673,15 +6673,22 @@
               </a:defRPr>
             </a:pPr>
             <a:r>
-              <a:rPr sz="900" b="1" i="0" dirty="0">
+              <a:rPr lang="en-US" sz="900" b="1" dirty="0">
                 <a:solidFill>
                   <a:srgbClr val="3B82F6"/>
                 </a:solidFill>
                 <a:latin typeface="Times New Roman" panose="02020603050405020304" pitchFamily="18" charset="0"/>
                 <a:cs typeface="Times New Roman" panose="02020603050405020304" pitchFamily="18" charset="0"/>
               </a:rPr>
-              <a:t>SUBMITTED BY</a:t>
-            </a:r>
+              <a:t>Presented by</a:t>
+            </a:r>
+            <a:endParaRPr sz="900" b="1" i="0" dirty="0">
+              <a:solidFill>
+                <a:srgbClr val="3B82F6"/>
+              </a:solidFill>
+              <a:latin typeface="Times New Roman" panose="02020603050405020304" pitchFamily="18" charset="0"/>
+              <a:cs typeface="Times New Roman" panose="02020603050405020304" pitchFamily="18" charset="0"/>
+            </a:endParaRPr>
           </a:p>
         </p:txBody>
       </p:sp>
@@ -6863,8 +6870,8 @@
         </p:nvSpPr>
         <p:spPr>
           <a:xfrm>
-            <a:off x="609600" y="333375"/>
-            <a:ext cx="5715000" cy="228600"/>
+            <a:off x="609600" y="387625"/>
+            <a:ext cx="5715000" cy="606288"/>
           </a:xfrm>
           <a:prstGeom prst="rect">
             <a:avLst/>
@@ -6887,13 +6894,26 @@
               </a:defRPr>
             </a:pPr>
             <a:r>
-              <a:rPr sz="900" b="1" i="0">
-                <a:solidFill>
-                  <a:srgbClr val="3B82F6"/>
-                </a:solidFill>
-              </a:rPr>
-              <a:t>LOCALIZED ERROR POSITIONS</a:t>
-            </a:r>
+              <a:rPr sz="4000" b="1" i="0" dirty="0">
+                <a:solidFill>
+                  <a:srgbClr val="111827"/>
+                </a:solidFill>
+              </a:rPr>
+              <a:t>L</a:t>
+            </a:r>
+            <a:r>
+              <a:rPr lang="en-US" sz="4000" b="1" i="0" dirty="0">
+                <a:solidFill>
+                  <a:srgbClr val="111827"/>
+                </a:solidFill>
+              </a:rPr>
+              <a:t>ocalized Error Positions</a:t>
+            </a:r>
+            <a:endParaRPr sz="4000" b="1" i="0" dirty="0">
+              <a:solidFill>
+                <a:srgbClr val="111827"/>
+              </a:solidFill>
+            </a:endParaRPr>
           </a:p>
         </p:txBody>
       </p:sp>
@@ -6913,8 +6933,8 @@
         </p:nvSpPr>
         <p:spPr>
           <a:xfrm>
-            <a:off x="609600" y="552450"/>
-            <a:ext cx="10953750" cy="666750"/>
+            <a:off x="609600" y="914400"/>
+            <a:ext cx="10953750" cy="934278"/>
           </a:xfrm>
           <a:prstGeom prst="rect">
             <a:avLst/>
@@ -6937,7 +6957,7 @@
               </a:defRPr>
             </a:pPr>
             <a:r>
-              <a:rPr sz="2850" b="0" i="0">
+              <a:rPr sz="2850" b="0" i="0" dirty="0">
                 <a:solidFill>
                   <a:srgbClr val="111827"/>
                 </a:solidFill>
@@ -6949,54 +6969,68 @@
       </p:sp>
       <p:sp>
         <p:nvSpPr>
-          <p:cNvPr id="4" name="shape">
-            <a:extLst>
-              <a:ext uri="{FF2B5EF4-FFF2-40B4-BE49-F238E27FC236}">
-                <a16:creationId xmlns:a16="http://schemas.microsoft.com/office/drawing/2014/main" id="{55F38DFE-99E3-475F-9D0E-505D2810111D}"/>
-              </a:ext>
-            </a:extLst>
-          </p:cNvPr>
-          <p:cNvSpPr>
-            <a:spLocks noGrp="1"/>
-          </p:cNvSpPr>
-          <p:nvPr/>
-        </p:nvSpPr>
-        <p:spPr>
-          <a:xfrm>
-            <a:off x="666750" y="5429250"/>
-            <a:ext cx="2571750" cy="619125"/>
-          </a:xfrm>
-          <a:prstGeom prst="roundRect">
-            <a:avLst>
-              <a:gd name="adj" fmla="val 10769"/>
-            </a:avLst>
-          </a:prstGeom>
-          <a:solidFill>
-            <a:srgbClr val="EEF6FF"/>
-          </a:solidFill>
-          <a:ln w="0">
-            <a:noFill/>
-            <a:prstDash val="solid"/>
-          </a:ln>
-        </p:spPr>
-      </p:sp>
-      <p:sp>
-        <p:nvSpPr>
-          <p:cNvPr id="5" name="text">
-            <a:extLst>
-              <a:ext uri="{FF2B5EF4-FFF2-40B4-BE49-F238E27FC236}">
-                <a16:creationId xmlns:a16="http://schemas.microsoft.com/office/drawing/2014/main" id="{453DC5D2-7C06-4201-9674-672DA28F19CC}"/>
-              </a:ext>
-            </a:extLst>
-          </p:cNvPr>
-          <p:cNvSpPr>
-            <a:spLocks noGrp="1"/>
-          </p:cNvSpPr>
-          <p:nvPr/>
-        </p:nvSpPr>
-        <p:spPr>
-          <a:xfrm>
-            <a:off x="809625" y="5514975"/>
+          <p:cNvPr id="6" name="text">
+            <a:extLst>
+              <a:ext uri="{FF2B5EF4-FFF2-40B4-BE49-F238E27FC236}">
+                <a16:creationId xmlns:a16="http://schemas.microsoft.com/office/drawing/2014/main" id="{25E55FB3-B33E-4C37-BE20-544B73DF27ED}"/>
+              </a:ext>
+            </a:extLst>
+          </p:cNvPr>
+          <p:cNvSpPr>
+            <a:spLocks noGrp="1"/>
+          </p:cNvSpPr>
+          <p:nvPr/>
+        </p:nvSpPr>
+        <p:spPr>
+          <a:xfrm>
+            <a:off x="1333500" y="5514975"/>
+            <a:ext cx="1714500" cy="428625"/>
+          </a:xfrm>
+          <a:prstGeom prst="rect">
+            <a:avLst/>
+          </a:prstGeom>
+          <a:noFill/>
+          <a:ln w="0">
+            <a:noFill/>
+            <a:prstDash val="solid"/>
+          </a:ln>
+        </p:spPr>
+        <p:txBody>
+          <a:bodyPr anchor="ctr"/>
+          <a:lstStyle/>
+          <a:p>
+            <a:pPr algn="l">
+              <a:defRPr sz="1275" b="1" i="0">
+                <a:solidFill>
+                  <a:srgbClr val="111827"/>
+                </a:solidFill>
+              </a:defRPr>
+            </a:pPr>
+            <a:endParaRPr sz="1275" b="1" i="0" dirty="0">
+              <a:solidFill>
+                <a:srgbClr val="111827"/>
+              </a:solidFill>
+            </a:endParaRPr>
+          </a:p>
+        </p:txBody>
+      </p:sp>
+      <p:sp>
+        <p:nvSpPr>
+          <p:cNvPr id="8" name="text">
+            <a:extLst>
+              <a:ext uri="{FF2B5EF4-FFF2-40B4-BE49-F238E27FC236}">
+                <a16:creationId xmlns:a16="http://schemas.microsoft.com/office/drawing/2014/main" id="{535A4A97-5098-4935-89FF-CBBF0DE8CC56}"/>
+              </a:ext>
+            </a:extLst>
+          </p:cNvPr>
+          <p:cNvSpPr>
+            <a:spLocks noGrp="1"/>
+          </p:cNvSpPr>
+          <p:nvPr/>
+        </p:nvSpPr>
+        <p:spPr>
+          <a:xfrm>
+            <a:off x="3609975" y="5514975"/>
             <a:ext cx="523875" cy="428625"/>
           </a:xfrm>
           <a:prstGeom prst="rect">
@@ -7019,36 +7053,33 @@
                 </a:solidFill>
               </a:defRPr>
             </a:pPr>
-            <a:r>
-              <a:rPr sz="1500" b="1" i="0" dirty="0">
-                <a:solidFill>
-                  <a:srgbClr val="3B82F6"/>
-                </a:solidFill>
-                <a:latin typeface="Cambria Math" panose="02040503050406030204" pitchFamily="18" charset="0"/>
-                <a:ea typeface="Cambria Math" panose="02040503050406030204" pitchFamily="18" charset="0"/>
-              </a:rPr>
-              <a:t>E₁</a:t>
-            </a:r>
-          </a:p>
-        </p:txBody>
-      </p:sp>
-      <p:sp>
-        <p:nvSpPr>
-          <p:cNvPr id="6" name="text">
-            <a:extLst>
-              <a:ext uri="{FF2B5EF4-FFF2-40B4-BE49-F238E27FC236}">
-                <a16:creationId xmlns:a16="http://schemas.microsoft.com/office/drawing/2014/main" id="{25E55FB3-B33E-4C37-BE20-544B73DF27ED}"/>
-              </a:ext>
-            </a:extLst>
-          </p:cNvPr>
-          <p:cNvSpPr>
-            <a:spLocks noGrp="1"/>
-          </p:cNvSpPr>
-          <p:nvPr/>
-        </p:nvSpPr>
-        <p:spPr>
-          <a:xfrm>
-            <a:off x="1333500" y="5514975"/>
+            <a:endParaRPr sz="1500" b="1" i="0" dirty="0">
+              <a:solidFill>
+                <a:srgbClr val="3B82F6"/>
+              </a:solidFill>
+              <a:latin typeface="Cambria Math" panose="02040503050406030204" pitchFamily="18" charset="0"/>
+              <a:ea typeface="Cambria Math" panose="02040503050406030204" pitchFamily="18" charset="0"/>
+            </a:endParaRPr>
+          </a:p>
+        </p:txBody>
+      </p:sp>
+      <p:sp>
+        <p:nvSpPr>
+          <p:cNvPr id="9" name="text">
+            <a:extLst>
+              <a:ext uri="{FF2B5EF4-FFF2-40B4-BE49-F238E27FC236}">
+                <a16:creationId xmlns:a16="http://schemas.microsoft.com/office/drawing/2014/main" id="{8CF82C51-4ED4-4F73-83C0-C834DEAD6175}"/>
+              </a:ext>
+            </a:extLst>
+          </p:cNvPr>
+          <p:cNvSpPr>
+            <a:spLocks noGrp="1"/>
+          </p:cNvSpPr>
+          <p:nvPr/>
+        </p:nvSpPr>
+        <p:spPr>
+          <a:xfrm>
+            <a:off x="4152900" y="5514975"/>
             <a:ext cx="1714500" cy="428625"/>
           </a:xfrm>
           <a:prstGeom prst="rect">
@@ -7071,67 +7102,31 @@
                 </a:solidFill>
               </a:defRPr>
             </a:pPr>
-            <a:r>
-              <a:rPr sz="1275" b="1" i="0">
-                <a:solidFill>
-                  <a:srgbClr val="111827"/>
-                </a:solidFill>
-              </a:rPr>
-              <a:t>State preparation</a:t>
-            </a:r>
-          </a:p>
-        </p:txBody>
-      </p:sp>
-      <p:sp>
-        <p:nvSpPr>
-          <p:cNvPr id="7" name="shape">
-            <a:extLst>
-              <a:ext uri="{FF2B5EF4-FFF2-40B4-BE49-F238E27FC236}">
-                <a16:creationId xmlns:a16="http://schemas.microsoft.com/office/drawing/2014/main" id="{4E53DB1D-F869-4B35-A8B5-9EB8895221D0}"/>
-              </a:ext>
-            </a:extLst>
-          </p:cNvPr>
-          <p:cNvSpPr>
-            <a:spLocks noGrp="1"/>
-          </p:cNvSpPr>
-          <p:nvPr/>
-        </p:nvSpPr>
-        <p:spPr>
-          <a:xfrm>
-            <a:off x="3467100" y="5429250"/>
-            <a:ext cx="2571750" cy="619125"/>
-          </a:xfrm>
-          <a:prstGeom prst="roundRect">
-            <a:avLst>
-              <a:gd name="adj" fmla="val 10769"/>
-            </a:avLst>
-          </a:prstGeom>
-          <a:solidFill>
-            <a:srgbClr val="E9EEF4"/>
-          </a:solidFill>
-          <a:ln w="0">
-            <a:noFill/>
-            <a:prstDash val="solid"/>
-          </a:ln>
-        </p:spPr>
-      </p:sp>
-      <p:sp>
-        <p:nvSpPr>
-          <p:cNvPr id="8" name="text">
-            <a:extLst>
-              <a:ext uri="{FF2B5EF4-FFF2-40B4-BE49-F238E27FC236}">
-                <a16:creationId xmlns:a16="http://schemas.microsoft.com/office/drawing/2014/main" id="{535A4A97-5098-4935-89FF-CBBF0DE8CC56}"/>
-              </a:ext>
-            </a:extLst>
-          </p:cNvPr>
-          <p:cNvSpPr>
-            <a:spLocks noGrp="1"/>
-          </p:cNvSpPr>
-          <p:nvPr/>
-        </p:nvSpPr>
-        <p:spPr>
-          <a:xfrm>
-            <a:off x="3609975" y="5514975"/>
+            <a:endParaRPr sz="1275" b="1" i="0" dirty="0">
+              <a:solidFill>
+                <a:srgbClr val="111827"/>
+              </a:solidFill>
+            </a:endParaRPr>
+          </a:p>
+        </p:txBody>
+      </p:sp>
+      <p:sp>
+        <p:nvSpPr>
+          <p:cNvPr id="11" name="text">
+            <a:extLst>
+              <a:ext uri="{FF2B5EF4-FFF2-40B4-BE49-F238E27FC236}">
+                <a16:creationId xmlns:a16="http://schemas.microsoft.com/office/drawing/2014/main" id="{B1386F11-5D53-4419-A211-E4D1EF3C6808}"/>
+              </a:ext>
+            </a:extLst>
+          </p:cNvPr>
+          <p:cNvSpPr>
+            <a:spLocks noGrp="1"/>
+          </p:cNvSpPr>
+          <p:nvPr/>
+        </p:nvSpPr>
+        <p:spPr>
+          <a:xfrm>
+            <a:off x="6410325" y="5514975"/>
             <a:ext cx="523875" cy="428625"/>
           </a:xfrm>
           <a:prstGeom prst="rect">
@@ -7154,36 +7149,31 @@
                 </a:solidFill>
               </a:defRPr>
             </a:pPr>
-            <a:r>
-              <a:rPr sz="1500" b="1" i="0" dirty="0">
-                <a:solidFill>
-                  <a:srgbClr val="3B82F6"/>
-                </a:solidFill>
-                <a:latin typeface="Cambria Math" panose="02040503050406030204" pitchFamily="18" charset="0"/>
-                <a:ea typeface="Cambria Math" panose="02040503050406030204" pitchFamily="18" charset="0"/>
-              </a:rPr>
-              <a:t>E₂</a:t>
-            </a:r>
-          </a:p>
-        </p:txBody>
-      </p:sp>
-      <p:sp>
-        <p:nvSpPr>
-          <p:cNvPr id="9" name="text">
-            <a:extLst>
-              <a:ext uri="{FF2B5EF4-FFF2-40B4-BE49-F238E27FC236}">
-                <a16:creationId xmlns:a16="http://schemas.microsoft.com/office/drawing/2014/main" id="{8CF82C51-4ED4-4F73-83C0-C834DEAD6175}"/>
-              </a:ext>
-            </a:extLst>
-          </p:cNvPr>
-          <p:cNvSpPr>
-            <a:spLocks noGrp="1"/>
-          </p:cNvSpPr>
-          <p:nvPr/>
-        </p:nvSpPr>
-        <p:spPr>
-          <a:xfrm>
-            <a:off x="4152900" y="5514975"/>
+            <a:endParaRPr sz="1500" b="1" i="0" dirty="0">
+              <a:solidFill>
+                <a:srgbClr val="3B82F6"/>
+              </a:solidFill>
+            </a:endParaRPr>
+          </a:p>
+        </p:txBody>
+      </p:sp>
+      <p:sp>
+        <p:nvSpPr>
+          <p:cNvPr id="12" name="text">
+            <a:extLst>
+              <a:ext uri="{FF2B5EF4-FFF2-40B4-BE49-F238E27FC236}">
+                <a16:creationId xmlns:a16="http://schemas.microsoft.com/office/drawing/2014/main" id="{476E608C-F623-4B1F-83CA-00F43B802C66}"/>
+              </a:ext>
+            </a:extLst>
+          </p:cNvPr>
+          <p:cNvSpPr>
+            <a:spLocks noGrp="1"/>
+          </p:cNvSpPr>
+          <p:nvPr/>
+        </p:nvSpPr>
+        <p:spPr>
+          <a:xfrm>
+            <a:off x="6953250" y="5514975"/>
             <a:ext cx="1714500" cy="428625"/>
           </a:xfrm>
           <a:prstGeom prst="rect">
@@ -7206,67 +7196,31 @@
                 </a:solidFill>
               </a:defRPr>
             </a:pPr>
-            <a:r>
-              <a:rPr sz="1275" b="1" i="0">
-                <a:solidFill>
-                  <a:srgbClr val="111827"/>
-                </a:solidFill>
-              </a:rPr>
-              <a:t>Oracle input</a:t>
-            </a:r>
-          </a:p>
-        </p:txBody>
-      </p:sp>
-      <p:sp>
-        <p:nvSpPr>
-          <p:cNvPr id="10" name="shape">
-            <a:extLst>
-              <a:ext uri="{FF2B5EF4-FFF2-40B4-BE49-F238E27FC236}">
-                <a16:creationId xmlns:a16="http://schemas.microsoft.com/office/drawing/2014/main" id="{9F5D4524-6687-4FB8-BDC9-857A714CE5F1}"/>
-              </a:ext>
-            </a:extLst>
-          </p:cNvPr>
-          <p:cNvSpPr>
-            <a:spLocks noGrp="1"/>
-          </p:cNvSpPr>
-          <p:nvPr/>
-        </p:nvSpPr>
-        <p:spPr>
-          <a:xfrm>
-            <a:off x="6267450" y="5429250"/>
-            <a:ext cx="2571750" cy="619125"/>
-          </a:xfrm>
-          <a:prstGeom prst="roundRect">
-            <a:avLst>
-              <a:gd name="adj" fmla="val 10769"/>
-            </a:avLst>
-          </a:prstGeom>
-          <a:solidFill>
-            <a:srgbClr val="EEF6FF"/>
-          </a:solidFill>
-          <a:ln w="0">
-            <a:noFill/>
-            <a:prstDash val="solid"/>
-          </a:ln>
-        </p:spPr>
-      </p:sp>
-      <p:sp>
-        <p:nvSpPr>
-          <p:cNvPr id="11" name="text">
-            <a:extLst>
-              <a:ext uri="{FF2B5EF4-FFF2-40B4-BE49-F238E27FC236}">
-                <a16:creationId xmlns:a16="http://schemas.microsoft.com/office/drawing/2014/main" id="{B1386F11-5D53-4419-A211-E4D1EF3C6808}"/>
-              </a:ext>
-            </a:extLst>
-          </p:cNvPr>
-          <p:cNvSpPr>
-            <a:spLocks noGrp="1"/>
-          </p:cNvSpPr>
-          <p:nvPr/>
-        </p:nvSpPr>
-        <p:spPr>
-          <a:xfrm>
-            <a:off x="6410325" y="5514975"/>
+            <a:endParaRPr sz="1275" b="1" i="0" dirty="0">
+              <a:solidFill>
+                <a:srgbClr val="111827"/>
+              </a:solidFill>
+            </a:endParaRPr>
+          </a:p>
+        </p:txBody>
+      </p:sp>
+      <p:sp>
+        <p:nvSpPr>
+          <p:cNvPr id="14" name="text">
+            <a:extLst>
+              <a:ext uri="{FF2B5EF4-FFF2-40B4-BE49-F238E27FC236}">
+                <a16:creationId xmlns:a16="http://schemas.microsoft.com/office/drawing/2014/main" id="{F421F02E-DC5B-4D25-8E4D-63B09E29034D}"/>
+              </a:ext>
+            </a:extLst>
+          </p:cNvPr>
+          <p:cNvSpPr>
+            <a:spLocks noGrp="1"/>
+          </p:cNvSpPr>
+          <p:nvPr/>
+        </p:nvSpPr>
+        <p:spPr>
+          <a:xfrm>
+            <a:off x="9210675" y="5514975"/>
             <a:ext cx="523875" cy="428625"/>
           </a:xfrm>
           <a:prstGeom prst="rect">
@@ -7289,199 +7243,13 @@
                 </a:solidFill>
               </a:defRPr>
             </a:pPr>
-            <a:r>
-              <a:rPr sz="1500" b="1" i="0">
-                <a:solidFill>
-                  <a:srgbClr val="3B82F6"/>
-                </a:solidFill>
-              </a:rPr>
-              <a:t>E₃</a:t>
-            </a:r>
-          </a:p>
-        </p:txBody>
-      </p:sp>
-      <p:sp>
-        <p:nvSpPr>
-          <p:cNvPr id="12" name="text">
-            <a:extLst>
-              <a:ext uri="{FF2B5EF4-FFF2-40B4-BE49-F238E27FC236}">
-                <a16:creationId xmlns:a16="http://schemas.microsoft.com/office/drawing/2014/main" id="{476E608C-F623-4B1F-83CA-00F43B802C66}"/>
-              </a:ext>
-            </a:extLst>
-          </p:cNvPr>
-          <p:cNvSpPr>
-            <a:spLocks noGrp="1"/>
-          </p:cNvSpPr>
-          <p:nvPr/>
-        </p:nvSpPr>
-        <p:spPr>
-          <a:xfrm>
-            <a:off x="6953250" y="5514975"/>
-            <a:ext cx="1714500" cy="428625"/>
-          </a:xfrm>
-          <a:prstGeom prst="rect">
-            <a:avLst/>
-          </a:prstGeom>
-          <a:noFill/>
-          <a:ln w="0">
-            <a:noFill/>
-            <a:prstDash val="solid"/>
-          </a:ln>
-        </p:spPr>
-        <p:txBody>
-          <a:bodyPr anchor="ctr"/>
-          <a:lstStyle/>
-          <a:p>
-            <a:pPr algn="l">
-              <a:defRPr sz="1275" b="1" i="0">
-                <a:solidFill>
-                  <a:srgbClr val="111827"/>
-                </a:solidFill>
-              </a:defRPr>
-            </a:pPr>
-            <a:r>
-              <a:rPr sz="1275" b="1" i="0">
-                <a:solidFill>
-                  <a:srgbClr val="111827"/>
-                </a:solidFill>
-              </a:rPr>
-              <a:t>Oracle output</a:t>
-            </a:r>
-          </a:p>
-        </p:txBody>
-      </p:sp>
-      <p:sp>
-        <p:nvSpPr>
-          <p:cNvPr id="13" name="shape">
-            <a:extLst>
-              <a:ext uri="{FF2B5EF4-FFF2-40B4-BE49-F238E27FC236}">
-                <a16:creationId xmlns:a16="http://schemas.microsoft.com/office/drawing/2014/main" id="{98F7D90D-617B-420B-85EF-75E7FCEA0A20}"/>
-              </a:ext>
-            </a:extLst>
-          </p:cNvPr>
-          <p:cNvSpPr>
-            <a:spLocks noGrp="1"/>
-          </p:cNvSpPr>
-          <p:nvPr/>
-        </p:nvSpPr>
-        <p:spPr>
-          <a:xfrm>
-            <a:off x="9067800" y="5429250"/>
-            <a:ext cx="2571750" cy="619125"/>
-          </a:xfrm>
-          <a:prstGeom prst="roundRect">
-            <a:avLst>
-              <a:gd name="adj" fmla="val 10769"/>
-            </a:avLst>
-          </a:prstGeom>
-          <a:solidFill>
-            <a:srgbClr val="E9EEF4"/>
-          </a:solidFill>
-          <a:ln w="0">
-            <a:noFill/>
-            <a:prstDash val="solid"/>
-          </a:ln>
-        </p:spPr>
-      </p:sp>
-      <p:sp>
-        <p:nvSpPr>
-          <p:cNvPr id="14" name="text">
-            <a:extLst>
-              <a:ext uri="{FF2B5EF4-FFF2-40B4-BE49-F238E27FC236}">
-                <a16:creationId xmlns:a16="http://schemas.microsoft.com/office/drawing/2014/main" id="{F421F02E-DC5B-4D25-8E4D-63B09E29034D}"/>
-              </a:ext>
-            </a:extLst>
-          </p:cNvPr>
-          <p:cNvSpPr>
-            <a:spLocks noGrp="1"/>
-          </p:cNvSpPr>
-          <p:nvPr/>
-        </p:nvSpPr>
-        <p:spPr>
-          <a:xfrm>
-            <a:off x="9210675" y="5514975"/>
-            <a:ext cx="523875" cy="428625"/>
-          </a:xfrm>
-          <a:prstGeom prst="rect">
-            <a:avLst/>
-          </a:prstGeom>
-          <a:noFill/>
-          <a:ln w="0">
-            <a:noFill/>
-            <a:prstDash val="solid"/>
-          </a:ln>
-        </p:spPr>
-        <p:txBody>
-          <a:bodyPr anchor="ctr"/>
-          <a:lstStyle/>
-          <a:p>
-            <a:pPr algn="l">
-              <a:defRPr sz="1500" b="1" i="0">
-                <a:solidFill>
-                  <a:srgbClr val="3B82F6"/>
-                </a:solidFill>
-              </a:defRPr>
-            </a:pPr>
-            <a:r>
-              <a:rPr sz="1500" b="1" i="0" dirty="0">
-                <a:solidFill>
-                  <a:srgbClr val="3B82F6"/>
-                </a:solidFill>
-                <a:latin typeface="Cambria Math" panose="02040503050406030204" pitchFamily="18" charset="0"/>
-                <a:ea typeface="Cambria Math" panose="02040503050406030204" pitchFamily="18" charset="0"/>
-              </a:rPr>
-              <a:t>E₄</a:t>
-            </a:r>
-          </a:p>
-        </p:txBody>
-      </p:sp>
-      <p:sp>
-        <p:nvSpPr>
-          <p:cNvPr id="15" name="text">
-            <a:extLst>
-              <a:ext uri="{FF2B5EF4-FFF2-40B4-BE49-F238E27FC236}">
-                <a16:creationId xmlns:a16="http://schemas.microsoft.com/office/drawing/2014/main" id="{49DCCA7C-5834-4860-845F-3298433F16E5}"/>
-              </a:ext>
-            </a:extLst>
-          </p:cNvPr>
-          <p:cNvSpPr>
-            <a:spLocks noGrp="1"/>
-          </p:cNvSpPr>
-          <p:nvPr/>
-        </p:nvSpPr>
-        <p:spPr>
-          <a:xfrm>
-            <a:off x="9753600" y="5514975"/>
-            <a:ext cx="1714500" cy="428625"/>
-          </a:xfrm>
-          <a:prstGeom prst="rect">
-            <a:avLst/>
-          </a:prstGeom>
-          <a:noFill/>
-          <a:ln w="0">
-            <a:noFill/>
-            <a:prstDash val="solid"/>
-          </a:ln>
-        </p:spPr>
-        <p:txBody>
-          <a:bodyPr anchor="ctr"/>
-          <a:lstStyle/>
-          <a:p>
-            <a:pPr algn="l">
-              <a:defRPr sz="1275" b="1" i="0">
-                <a:solidFill>
-                  <a:srgbClr val="111827"/>
-                </a:solidFill>
-              </a:defRPr>
-            </a:pPr>
-            <a:r>
-              <a:rPr sz="1275" b="1" i="0">
-                <a:solidFill>
-                  <a:srgbClr val="111827"/>
-                </a:solidFill>
-              </a:rPr>
-              <a:t>Before measurement</a:t>
-            </a:r>
+            <a:endParaRPr sz="1500" b="1" i="0" dirty="0">
+              <a:solidFill>
+                <a:srgbClr val="3B82F6"/>
+              </a:solidFill>
+              <a:latin typeface="Cambria Math" panose="02040503050406030204" pitchFamily="18" charset="0"/>
+              <a:ea typeface="Cambria Math" panose="02040503050406030204" pitchFamily="18" charset="0"/>
+            </a:endParaRPr>
           </a:p>
         </p:txBody>
       </p:sp>
@@ -7563,8 +7331,8 @@
         </p:blipFill>
         <p:spPr>
           <a:xfrm>
-            <a:off x="371670" y="1304925"/>
-            <a:ext cx="10515600" cy="3951722"/>
+            <a:off x="500879" y="2243345"/>
+            <a:ext cx="10515600" cy="3818372"/>
           </a:xfrm>
           <a:prstGeom prst="rect">
             <a:avLst/>
@@ -7625,8 +7393,8 @@
         </p:nvSpPr>
         <p:spPr>
           <a:xfrm>
-            <a:off x="609600" y="333375"/>
-            <a:ext cx="5715000" cy="228600"/>
+            <a:off x="609600" y="333374"/>
+            <a:ext cx="5715000" cy="495299"/>
           </a:xfrm>
           <a:prstGeom prst="rect">
             <a:avLst/>
@@ -7649,13 +7417,18 @@
               </a:defRPr>
             </a:pPr>
             <a:r>
-              <a:rPr sz="900" b="1" i="0">
-                <a:solidFill>
-                  <a:srgbClr val="3B82F6"/>
-                </a:solidFill>
-              </a:rPr>
-              <a:t>SIMULATION METHODOLOGY</a:t>
-            </a:r>
+              <a:rPr lang="en-US" sz="4000" dirty="0">
+                <a:solidFill>
+                  <a:srgbClr val="111827"/>
+                </a:solidFill>
+              </a:rPr>
+              <a:t>Simulation Methodology</a:t>
+            </a:r>
+            <a:endParaRPr sz="4000" b="1" i="0" dirty="0">
+              <a:solidFill>
+                <a:srgbClr val="111827"/>
+              </a:solidFill>
+            </a:endParaRPr>
           </a:p>
         </p:txBody>
       </p:sp>
@@ -7675,8 +7448,8 @@
         </p:nvSpPr>
         <p:spPr>
           <a:xfrm>
-            <a:off x="609600" y="552450"/>
-            <a:ext cx="10953750" cy="666750"/>
+            <a:off x="609600" y="4371976"/>
+            <a:ext cx="10953749" cy="714375"/>
           </a:xfrm>
           <a:prstGeom prst="rect">
             <a:avLst/>
@@ -7699,7 +7472,7 @@
               </a:defRPr>
             </a:pPr>
             <a:r>
-              <a:rPr sz="2850" b="0" i="0">
+              <a:rPr lang="en-US" sz="2850" b="0" i="0" dirty="0">
                 <a:solidFill>
                   <a:srgbClr val="111827"/>
                 </a:solidFill>
@@ -7725,8 +7498,8 @@
         </p:nvSpPr>
         <p:spPr>
           <a:xfrm>
-            <a:off x="609600" y="1571625"/>
-            <a:ext cx="5238750" cy="3857625"/>
+            <a:off x="609600" y="1762126"/>
+            <a:ext cx="5238750" cy="2266948"/>
           </a:xfrm>
           <a:prstGeom prst="roundRect">
             <a:avLst>
@@ -7758,8 +7531,8 @@
         </p:nvSpPr>
         <p:spPr>
           <a:xfrm>
-            <a:off x="6076950" y="1571625"/>
-            <a:ext cx="5505450" cy="3857625"/>
+            <a:off x="6076950" y="1790700"/>
+            <a:ext cx="5505450" cy="2238374"/>
           </a:xfrm>
           <a:prstGeom prst="roundRect">
             <a:avLst>
@@ -7915,7 +7688,7 @@
               </a:defRPr>
             </a:pPr>
             <a:r>
-              <a:rPr sz="1500" b="0" i="0">
+              <a:rPr sz="1500" b="0" i="0" dirty="0">
                 <a:solidFill>
                   <a:srgbClr val="111827"/>
                 </a:solidFill>
@@ -8798,8 +8571,8 @@
         </p:nvSpPr>
         <p:spPr>
           <a:xfrm>
-            <a:off x="609600" y="333375"/>
-            <a:ext cx="5715000" cy="228600"/>
+            <a:off x="609600" y="119270"/>
+            <a:ext cx="5715000" cy="1062657"/>
           </a:xfrm>
           <a:prstGeom prst="rect">
             <a:avLst/>
@@ -8822,13 +8595,18 @@
               </a:defRPr>
             </a:pPr>
             <a:r>
-              <a:rPr sz="900" b="1" i="0">
-                <a:solidFill>
-                  <a:srgbClr val="3B82F6"/>
-                </a:solidFill>
-              </a:rPr>
-              <a:t>SIMULATION WORKFLOW</a:t>
-            </a:r>
+              <a:rPr lang="en-US" sz="4000" dirty="0">
+                <a:solidFill>
+                  <a:srgbClr val="111827"/>
+                </a:solidFill>
+              </a:rPr>
+              <a:t>Simulation workflow</a:t>
+            </a:r>
+            <a:endParaRPr sz="4000" b="1" i="0" dirty="0">
+              <a:solidFill>
+                <a:srgbClr val="111827"/>
+              </a:solidFill>
+            </a:endParaRPr>
           </a:p>
         </p:txBody>
       </p:sp>
@@ -8848,8 +8626,8 @@
         </p:nvSpPr>
         <p:spPr>
           <a:xfrm>
-            <a:off x="609600" y="552450"/>
-            <a:ext cx="10953750" cy="666750"/>
+            <a:off x="609600" y="1220028"/>
+            <a:ext cx="10953750" cy="571500"/>
           </a:xfrm>
           <a:prstGeom prst="rect">
             <a:avLst/>
@@ -8872,7 +8650,7 @@
               </a:defRPr>
             </a:pPr>
             <a:r>
-              <a:rPr sz="2850" b="0" i="0">
+              <a:rPr sz="2850" b="0" i="0" dirty="0">
                 <a:solidFill>
                   <a:srgbClr val="111827"/>
                 </a:solidFill>
@@ -9081,7 +8859,7 @@
         </p:nvSpPr>
         <p:spPr>
           <a:xfrm>
-            <a:off x="2771775" y="1952625"/>
+            <a:off x="2771775" y="1972503"/>
             <a:ext cx="1952625" cy="1524000"/>
           </a:xfrm>
           <a:prstGeom prst="roundRect">
@@ -10038,7 +9816,7 @@
         </p:nvSpPr>
         <p:spPr>
           <a:xfrm>
-            <a:off x="0" y="-28281"/>
+            <a:off x="0" y="0"/>
             <a:ext cx="12192000" cy="6858000"/>
           </a:xfrm>
           <a:prstGeom prst="rect">
@@ -10056,10 +9834,6 @@
           <a:bodyPr/>
           <a:lstStyle/>
           <a:p>
-            <a:r>
-              <a:rPr lang="en-US" dirty="0" err="1"/>
-              <a:t>zzzzz</a:t>
-            </a:r>
             <a:endParaRPr lang="en-US" dirty="0"/>
           </a:p>
         </p:txBody>
@@ -10080,8 +9854,8 @@
         </p:nvSpPr>
         <p:spPr>
           <a:xfrm>
-            <a:off x="685800" y="904875"/>
-            <a:ext cx="4762500" cy="247650"/>
+            <a:off x="685800" y="904874"/>
+            <a:ext cx="7086600" cy="894109"/>
           </a:xfrm>
           <a:prstGeom prst="rect">
             <a:avLst/>
@@ -10104,13 +9878,18 @@
               </a:defRPr>
             </a:pPr>
             <a:r>
-              <a:rPr sz="975" b="1" i="0">
-                <a:solidFill>
-                  <a:srgbClr val="3B82F6"/>
-                </a:solidFill>
-              </a:rPr>
-              <a:t>RESULTS &amp; DISCUSSION</a:t>
-            </a:r>
+              <a:rPr lang="en-US" sz="4000" dirty="0">
+                <a:solidFill>
+                  <a:srgbClr val="111827"/>
+                </a:solidFill>
+              </a:rPr>
+              <a:t>Results and Discussion</a:t>
+            </a:r>
+            <a:endParaRPr lang="en-US" sz="4000" b="1" i="0" dirty="0">
+              <a:solidFill>
+                <a:srgbClr val="111827"/>
+              </a:solidFill>
+            </a:endParaRPr>
           </a:p>
         </p:txBody>
       </p:sp>
@@ -10130,8 +9909,8 @@
         </p:nvSpPr>
         <p:spPr>
           <a:xfrm>
-            <a:off x="685800" y="1524000"/>
-            <a:ext cx="9250052" cy="1428750"/>
+            <a:off x="685800" y="1941858"/>
+            <a:ext cx="9250052" cy="1010892"/>
           </a:xfrm>
           <a:prstGeom prst="rect">
             <a:avLst/>
@@ -10154,7 +9933,7 @@
               </a:defRPr>
             </a:pPr>
             <a:r>
-              <a:rPr sz="3750" b="1" i="0" dirty="0">
+              <a:rPr sz="2800" i="0" dirty="0">
                 <a:solidFill>
                   <a:srgbClr val="111827"/>
                 </a:solidFill>
@@ -10162,7 +9941,7 @@
               <a:t>Sensitivity is an</a:t>
             </a:r>
             <a:r>
-              <a:rPr lang="en-US" sz="3750" b="1" dirty="0">
+              <a:rPr lang="en-US" sz="2800" dirty="0">
                 <a:solidFill>
                   <a:srgbClr val="111827"/>
                 </a:solidFill>
@@ -10170,7 +9949,7 @@
               <a:t> </a:t>
             </a:r>
             <a:r>
-              <a:rPr lang="en-US" sz="3750" b="1" i="0" dirty="0">
+              <a:rPr lang="en-US" sz="2800" i="0" dirty="0">
                 <a:solidFill>
                   <a:srgbClr val="111827"/>
                 </a:solidFill>
@@ -10220,7 +9999,7 @@
               </a:defRPr>
             </a:pPr>
             <a:r>
-              <a:rPr sz="1650" b="0" i="0">
+              <a:rPr sz="1650" b="0" i="0" dirty="0">
                 <a:solidFill>
                   <a:srgbClr val="5F6B7A"/>
                 </a:solidFill>
@@ -10765,21 +10544,57 @@
         </p:nvSpPr>
         <p:spPr>
           <a:xfrm>
-            <a:off x="609600" y="333375"/>
-            <a:ext cx="5715000" cy="228600"/>
-          </a:xfrm>
-          <a:prstGeom prst="rect">
-            <a:avLst/>
-          </a:prstGeom>
-          <a:noFill/>
-          <a:ln w="0">
-            <a:noFill/>
-            <a:prstDash val="solid"/>
-          </a:ln>
-        </p:spPr>
-        <p:txBody>
-          <a:bodyPr anchor="ctr"/>
-          <a:lstStyle/>
+            <a:off x="609600" y="308113"/>
+            <a:ext cx="5715000" cy="745435"/>
+          </a:xfrm>
+          <a:prstGeom prst="rect">
+            <a:avLst/>
+          </a:prstGeom>
+          <a:noFill/>
+          <a:ln w="0">
+            <a:noFill/>
+            <a:prstDash val="solid"/>
+          </a:ln>
+        </p:spPr>
+        <p:txBody>
+          <a:bodyPr anchor="ctr"/>
+          <a:lstStyle/>
+          <a:p>
+            <a:pPr>
+              <a:defRPr sz="900" b="1" i="0">
+                <a:solidFill>
+                  <a:srgbClr val="3B82F6"/>
+                </a:solidFill>
+              </a:defRPr>
+            </a:pPr>
+            <a:endParaRPr lang="en-US" sz="4000" dirty="0">
+              <a:solidFill>
+                <a:srgbClr val="111827"/>
+              </a:solidFill>
+            </a:endParaRPr>
+          </a:p>
+          <a:p>
+            <a:pPr>
+              <a:defRPr sz="900" b="1" i="0">
+                <a:solidFill>
+                  <a:srgbClr val="3B82F6"/>
+                </a:solidFill>
+              </a:defRPr>
+            </a:pPr>
+            <a:r>
+              <a:rPr lang="en-US" sz="4000" dirty="0">
+                <a:solidFill>
+                  <a:srgbClr val="111827"/>
+                </a:solidFill>
+              </a:rPr>
+              <a:t>Continued…</a:t>
+            </a:r>
+            <a:endParaRPr lang="en-US" sz="4000" b="1" i="0" dirty="0">
+              <a:solidFill>
+                <a:srgbClr val="111827"/>
+              </a:solidFill>
+            </a:endParaRPr>
+          </a:p>
           <a:p>
             <a:pPr algn="l">
               <a:defRPr sz="900" b="1" i="0">
@@ -10788,14 +10603,11 @@
                 </a:solidFill>
               </a:defRPr>
             </a:pPr>
-            <a:r>
-              <a:rPr sz="900" b="1" i="0">
-                <a:solidFill>
-                  <a:srgbClr val="3B82F6"/>
-                </a:solidFill>
-              </a:rPr>
-              <a:t>RESULTS AND DISCUSSION</a:t>
-            </a:r>
+            <a:endParaRPr sz="4000" b="1" i="0" dirty="0">
+              <a:solidFill>
+                <a:srgbClr val="111827"/>
+              </a:solidFill>
+            </a:endParaRPr>
           </a:p>
         </p:txBody>
       </p:sp>
@@ -10838,14 +10650,11 @@
                 </a:solidFill>
               </a:defRPr>
             </a:pPr>
-            <a:r>
-              <a:rPr sz="2850" b="0" i="0">
-                <a:solidFill>
-                  <a:srgbClr val="111827"/>
-                </a:solidFill>
-              </a:rPr>
-              <a:t>For constant f(x)=1, X rotations expose E₁ and E₄</a:t>
-            </a:r>
+            <a:endParaRPr sz="2850" b="0" i="0" dirty="0">
+              <a:solidFill>
+                <a:srgbClr val="111827"/>
+              </a:solidFill>
+            </a:endParaRPr>
           </a:p>
         </p:txBody>
       </p:sp>
@@ -10865,8 +10674,8 @@
         </p:nvSpPr>
         <p:spPr>
           <a:xfrm>
-            <a:off x="8020050" y="1428750"/>
-            <a:ext cx="3562350" cy="4424512"/>
+            <a:off x="8020050" y="1638300"/>
+            <a:ext cx="3562350" cy="4234840"/>
           </a:xfrm>
           <a:prstGeom prst="roundRect">
             <a:avLst>
@@ -11472,7 +11281,7 @@
         </p:blipFill>
         <p:spPr>
           <a:xfrm>
-            <a:off x="464887" y="1318643"/>
+            <a:off x="415269" y="1673627"/>
             <a:ext cx="7242676" cy="4468755"/>
           </a:xfrm>
           <a:prstGeom prst="rect">
@@ -11534,21 +11343,71 @@
         </p:nvSpPr>
         <p:spPr>
           <a:xfrm>
-            <a:off x="609600" y="333375"/>
-            <a:ext cx="5715000" cy="228600"/>
-          </a:xfrm>
-          <a:prstGeom prst="rect">
-            <a:avLst/>
-          </a:prstGeom>
-          <a:noFill/>
-          <a:ln w="0">
-            <a:noFill/>
-            <a:prstDash val="solid"/>
-          </a:ln>
-        </p:spPr>
-        <p:txBody>
-          <a:bodyPr anchor="ctr"/>
-          <a:lstStyle/>
+            <a:off x="609600" y="109330"/>
+            <a:ext cx="5715000" cy="1029391"/>
+          </a:xfrm>
+          <a:prstGeom prst="rect">
+            <a:avLst/>
+          </a:prstGeom>
+          <a:noFill/>
+          <a:ln w="0">
+            <a:noFill/>
+            <a:prstDash val="solid"/>
+          </a:ln>
+        </p:spPr>
+        <p:txBody>
+          <a:bodyPr anchor="ctr"/>
+          <a:lstStyle/>
+          <a:p>
+            <a:pPr>
+              <a:defRPr sz="900" b="1" i="0">
+                <a:solidFill>
+                  <a:srgbClr val="3B82F6"/>
+                </a:solidFill>
+              </a:defRPr>
+            </a:pPr>
+            <a:endParaRPr lang="en-US" sz="4000" dirty="0">
+              <a:solidFill>
+                <a:srgbClr val="111827"/>
+              </a:solidFill>
+            </a:endParaRPr>
+          </a:p>
+          <a:p>
+            <a:pPr>
+              <a:defRPr sz="900" b="1" i="0">
+                <a:solidFill>
+                  <a:srgbClr val="3B82F6"/>
+                </a:solidFill>
+              </a:defRPr>
+            </a:pPr>
+            <a:endParaRPr lang="en-US" sz="4000" dirty="0">
+              <a:solidFill>
+                <a:srgbClr val="111827"/>
+              </a:solidFill>
+            </a:endParaRPr>
+          </a:p>
+          <a:p>
+            <a:pPr>
+              <a:defRPr sz="900" b="1" i="0">
+                <a:solidFill>
+                  <a:srgbClr val="3B82F6"/>
+                </a:solidFill>
+              </a:defRPr>
+            </a:pPr>
+            <a:r>
+              <a:rPr lang="en-US" sz="4000" dirty="0">
+                <a:solidFill>
+                  <a:srgbClr val="111827"/>
+                </a:solidFill>
+              </a:rPr>
+              <a:t>Continued…</a:t>
+            </a:r>
+            <a:endParaRPr lang="en-US" sz="4000" b="1" i="0" dirty="0">
+              <a:solidFill>
+                <a:srgbClr val="111827"/>
+              </a:solidFill>
+            </a:endParaRPr>
+          </a:p>
           <a:p>
             <a:pPr algn="l">
               <a:defRPr sz="900" b="1" i="0">
@@ -11557,14 +11416,25 @@
                 </a:solidFill>
               </a:defRPr>
             </a:pPr>
-            <a:r>
-              <a:rPr sz="900" b="1" i="0">
+            <a:endParaRPr lang="en-US" sz="4000" b="1" i="0" dirty="0">
+              <a:solidFill>
+                <a:srgbClr val="111827"/>
+              </a:solidFill>
+            </a:endParaRPr>
+          </a:p>
+          <a:p>
+            <a:pPr algn="l">
+              <a:defRPr sz="900" b="1" i="0">
                 <a:solidFill>
                   <a:srgbClr val="3B82F6"/>
                 </a:solidFill>
-              </a:rPr>
-              <a:t>RESULTS AND DISCUSSION</a:t>
-            </a:r>
+              </a:defRPr>
+            </a:pPr>
+            <a:endParaRPr sz="4000" b="1" i="0" dirty="0">
+              <a:solidFill>
+                <a:srgbClr val="3B82F6"/>
+              </a:solidFill>
+            </a:endParaRPr>
           </a:p>
         </p:txBody>
       </p:sp>
@@ -11607,14 +11477,11 @@
                 </a:solidFill>
               </a:defRPr>
             </a:pPr>
-            <a:r>
-              <a:rPr sz="2850" b="0" i="0">
-                <a:solidFill>
-                  <a:srgbClr val="111827"/>
-                </a:solidFill>
-              </a:rPr>
-              <a:t>For constant f(x)=1, Y rotations affect every stage</a:t>
-            </a:r>
+            <a:endParaRPr lang="en-US" sz="2850" b="0" i="0" dirty="0">
+              <a:solidFill>
+                <a:srgbClr val="111827"/>
+              </a:solidFill>
+            </a:endParaRPr>
           </a:p>
         </p:txBody>
       </p:sp>
@@ -11691,7 +11558,7 @@
               </a:defRPr>
             </a:pPr>
             <a:r>
-              <a:rPr sz="1650" b="1" i="0">
+              <a:rPr sz="1650" b="1" i="0" dirty="0">
                 <a:solidFill>
                   <a:srgbClr val="111827"/>
                 </a:solidFill>
@@ -11791,7 +11658,7 @@
               </a:defRPr>
             </a:pPr>
             <a:r>
-              <a:rPr sz="1350" b="0" i="0">
+              <a:rPr lang="en-US" sz="1350" b="0" i="0" dirty="0">
                 <a:solidFill>
                   <a:srgbClr val="111827"/>
                 </a:solidFill>
@@ -11891,7 +11758,7 @@
               </a:defRPr>
             </a:pPr>
             <a:r>
-              <a:rPr sz="1350" b="0" i="0">
+              <a:rPr sz="1350" b="0" i="0" dirty="0">
                 <a:solidFill>
                   <a:srgbClr val="111827"/>
                 </a:solidFill>
@@ -11991,7 +11858,7 @@
               </a:defRPr>
             </a:pPr>
             <a:r>
-              <a:rPr sz="1350" b="0" i="0">
+              <a:rPr sz="1350" b="0" i="0" dirty="0">
                 <a:solidFill>
                   <a:srgbClr val="111827"/>
                 </a:solidFill>
@@ -12017,7 +11884,7 @@
         </p:nvSpPr>
         <p:spPr>
           <a:xfrm>
-            <a:off x="8248650" y="4572000"/>
+            <a:off x="8248650" y="4714875"/>
             <a:ext cx="3095625" cy="628650"/>
           </a:xfrm>
           <a:prstGeom prst="roundRect">
@@ -12207,8 +12074,8 @@
         </p:blipFill>
         <p:spPr>
           <a:xfrm>
-            <a:off x="240509" y="1250524"/>
-            <a:ext cx="7242676" cy="4468755"/>
+            <a:off x="240509" y="1468092"/>
+            <a:ext cx="7242676" cy="4310407"/>
           </a:xfrm>
           <a:prstGeom prst="rect">
             <a:avLst/>
@@ -12269,21 +12136,85 @@
         </p:nvSpPr>
         <p:spPr>
           <a:xfrm>
-            <a:off x="609600" y="333375"/>
-            <a:ext cx="5715000" cy="228600"/>
-          </a:xfrm>
-          <a:prstGeom prst="rect">
-            <a:avLst/>
-          </a:prstGeom>
-          <a:noFill/>
-          <a:ln w="0">
-            <a:noFill/>
-            <a:prstDash val="solid"/>
-          </a:ln>
-        </p:spPr>
-        <p:txBody>
-          <a:bodyPr anchor="ctr"/>
-          <a:lstStyle/>
+            <a:off x="609600" y="313497"/>
+            <a:ext cx="5715000" cy="936564"/>
+          </a:xfrm>
+          <a:prstGeom prst="rect">
+            <a:avLst/>
+          </a:prstGeom>
+          <a:noFill/>
+          <a:ln w="0">
+            <a:noFill/>
+            <a:prstDash val="solid"/>
+          </a:ln>
+        </p:spPr>
+        <p:txBody>
+          <a:bodyPr anchor="ctr"/>
+          <a:lstStyle/>
+          <a:p>
+            <a:pPr>
+              <a:defRPr sz="900" b="1" i="0">
+                <a:solidFill>
+                  <a:srgbClr val="3B82F6"/>
+                </a:solidFill>
+              </a:defRPr>
+            </a:pPr>
+            <a:endParaRPr lang="en-US" sz="4000" dirty="0">
+              <a:solidFill>
+                <a:srgbClr val="111827"/>
+              </a:solidFill>
+            </a:endParaRPr>
+          </a:p>
+          <a:p>
+            <a:pPr>
+              <a:defRPr sz="900" b="1" i="0">
+                <a:solidFill>
+                  <a:srgbClr val="3B82F6"/>
+                </a:solidFill>
+              </a:defRPr>
+            </a:pPr>
+            <a:endParaRPr lang="en-US" sz="4000" dirty="0">
+              <a:solidFill>
+                <a:srgbClr val="111827"/>
+              </a:solidFill>
+            </a:endParaRPr>
+          </a:p>
+          <a:p>
+            <a:pPr>
+              <a:defRPr sz="900" b="1" i="0">
+                <a:solidFill>
+                  <a:srgbClr val="3B82F6"/>
+                </a:solidFill>
+              </a:defRPr>
+            </a:pPr>
+            <a:endParaRPr lang="en-US" sz="4000" dirty="0">
+              <a:solidFill>
+                <a:srgbClr val="111827"/>
+              </a:solidFill>
+            </a:endParaRPr>
+          </a:p>
+          <a:p>
+            <a:pPr>
+              <a:defRPr sz="900" b="1" i="0">
+                <a:solidFill>
+                  <a:srgbClr val="3B82F6"/>
+                </a:solidFill>
+              </a:defRPr>
+            </a:pPr>
+            <a:r>
+              <a:rPr lang="en-US" sz="4000" dirty="0">
+                <a:solidFill>
+                  <a:srgbClr val="111827"/>
+                </a:solidFill>
+              </a:rPr>
+              <a:t>Continued…</a:t>
+            </a:r>
+            <a:endParaRPr lang="en-US" sz="4000" b="1" i="0" dirty="0">
+              <a:solidFill>
+                <a:srgbClr val="111827"/>
+              </a:solidFill>
+            </a:endParaRPr>
+          </a:p>
           <a:p>
             <a:pPr algn="l">
               <a:defRPr sz="900" b="1" i="0">
@@ -12292,64 +12223,39 @@
                 </a:solidFill>
               </a:defRPr>
             </a:pPr>
-            <a:r>
-              <a:rPr sz="900" b="1" i="0">
+            <a:endParaRPr lang="en-US" sz="4000" b="1" i="0" dirty="0">
+              <a:solidFill>
+                <a:srgbClr val="111827"/>
+              </a:solidFill>
+            </a:endParaRPr>
+          </a:p>
+          <a:p>
+            <a:pPr algn="l">
+              <a:defRPr sz="900" b="1" i="0">
                 <a:solidFill>
                   <a:srgbClr val="3B82F6"/>
                 </a:solidFill>
-              </a:rPr>
-              <a:t>RESULTS AND DISCUSSION</a:t>
-            </a:r>
-          </a:p>
-        </p:txBody>
-      </p:sp>
-      <p:sp>
-        <p:nvSpPr>
-          <p:cNvPr id="2" name="slide-title">
-            <a:extLst>
-              <a:ext uri="{FF2B5EF4-FFF2-40B4-BE49-F238E27FC236}">
-                <a16:creationId xmlns:a16="http://schemas.microsoft.com/office/drawing/2014/main" id="{858C49D9-9434-4CD4-A1F9-D612018E5FEE}"/>
-              </a:ext>
-            </a:extLst>
-          </p:cNvPr>
-          <p:cNvSpPr>
-            <a:spLocks noGrp="1"/>
-          </p:cNvSpPr>
-          <p:nvPr/>
-        </p:nvSpPr>
-        <p:spPr>
-          <a:xfrm>
-            <a:off x="609600" y="552450"/>
-            <a:ext cx="10953750" cy="666750"/>
-          </a:xfrm>
-          <a:prstGeom prst="rect">
-            <a:avLst/>
-          </a:prstGeom>
-          <a:noFill/>
-          <a:ln w="0">
-            <a:noFill/>
-            <a:prstDash val="solid"/>
-          </a:ln>
-        </p:spPr>
-        <p:txBody>
-          <a:bodyPr anchor="ctr"/>
-          <a:lstStyle/>
+              </a:defRPr>
+            </a:pPr>
+            <a:endParaRPr lang="en-US" sz="4000" b="1" i="0" dirty="0">
+              <a:solidFill>
+                <a:srgbClr val="3B82F6"/>
+              </a:solidFill>
+            </a:endParaRPr>
+          </a:p>
           <a:p>
             <a:pPr algn="l">
-              <a:defRPr sz="2850" b="0" i="0">
-                <a:solidFill>
-                  <a:srgbClr val="111827"/>
-                </a:solidFill>
-              </a:defRPr>
-            </a:pPr>
-            <a:r>
-              <a:rPr sz="2850" b="0" i="0">
-                <a:solidFill>
-                  <a:srgbClr val="111827"/>
-                </a:solidFill>
-              </a:rPr>
-              <a:t>For constant f(x)=1, Z rotations target E₂ and E₃</a:t>
-            </a:r>
+              <a:defRPr sz="900" b="1" i="0">
+                <a:solidFill>
+                  <a:srgbClr val="3B82F6"/>
+                </a:solidFill>
+              </a:defRPr>
+            </a:pPr>
+            <a:endParaRPr sz="4000" b="1" i="0" dirty="0">
+              <a:solidFill>
+                <a:srgbClr val="3B82F6"/>
+              </a:solidFill>
+            </a:endParaRPr>
           </a:p>
         </p:txBody>
       </p:sp>
@@ -12369,7 +12275,7 @@
         </p:nvSpPr>
         <p:spPr>
           <a:xfrm>
-            <a:off x="8020050" y="1428750"/>
+            <a:off x="8004313" y="1428750"/>
             <a:ext cx="3562350" cy="4000500"/>
           </a:xfrm>
           <a:prstGeom prst="roundRect">
@@ -12426,13 +12332,34 @@
               </a:defRPr>
             </a:pPr>
             <a:r>
-              <a:rPr sz="1650" b="1" i="0">
+              <a:rPr sz="1650" b="1" i="0" dirty="0">
                 <a:solidFill>
                   <a:srgbClr val="111827"/>
                 </a:solidFill>
               </a:rPr>
               <a:t>Z-axis rotation</a:t>
             </a:r>
+            <a:r>
+              <a:rPr lang="en-US" sz="1650" b="1" i="0" dirty="0">
+                <a:solidFill>
+                  <a:srgbClr val="111827"/>
+                </a:solidFill>
+              </a:rPr>
+              <a:t> </a:t>
+            </a:r>
+            <a:r>
+              <a:rPr lang="en-US" sz="1800" b="0" i="0" dirty="0">
+                <a:solidFill>
+                  <a:srgbClr val="111827"/>
+                </a:solidFill>
+              </a:rPr>
+              <a:t>constant f(x)=1, Z rotations target E₂ and E₃</a:t>
+            </a:r>
+            <a:endParaRPr sz="1650" b="1" i="0" dirty="0">
+              <a:solidFill>
+                <a:srgbClr val="111827"/>
+              </a:solidFill>
+            </a:endParaRPr>
           </a:p>
         </p:txBody>
       </p:sp>
@@ -12942,8 +12869,8 @@
         </p:blipFill>
         <p:spPr>
           <a:xfrm>
-            <a:off x="202802" y="1269939"/>
-            <a:ext cx="7242676" cy="4468755"/>
+            <a:off x="202802" y="1428750"/>
+            <a:ext cx="7242676" cy="4309944"/>
           </a:xfrm>
           <a:prstGeom prst="rect">
             <a:avLst/>
@@ -13004,21 +12931,85 @@
         </p:nvSpPr>
         <p:spPr>
           <a:xfrm>
-            <a:off x="609600" y="333375"/>
-            <a:ext cx="5715000" cy="228600"/>
-          </a:xfrm>
-          <a:prstGeom prst="rect">
-            <a:avLst/>
-          </a:prstGeom>
-          <a:noFill/>
-          <a:ln w="0">
-            <a:noFill/>
-            <a:prstDash val="solid"/>
-          </a:ln>
-        </p:spPr>
-        <p:txBody>
-          <a:bodyPr anchor="ctr"/>
-          <a:lstStyle/>
+            <a:off x="609600" y="148595"/>
+            <a:ext cx="5715000" cy="998210"/>
+          </a:xfrm>
+          <a:prstGeom prst="rect">
+            <a:avLst/>
+          </a:prstGeom>
+          <a:noFill/>
+          <a:ln w="0">
+            <a:noFill/>
+            <a:prstDash val="solid"/>
+          </a:ln>
+        </p:spPr>
+        <p:txBody>
+          <a:bodyPr anchor="ctr"/>
+          <a:lstStyle/>
+          <a:p>
+            <a:pPr>
+              <a:defRPr sz="900" b="1" i="0">
+                <a:solidFill>
+                  <a:srgbClr val="3B82F6"/>
+                </a:solidFill>
+              </a:defRPr>
+            </a:pPr>
+            <a:endParaRPr lang="en-US" sz="4000" dirty="0">
+              <a:solidFill>
+                <a:srgbClr val="111827"/>
+              </a:solidFill>
+            </a:endParaRPr>
+          </a:p>
+          <a:p>
+            <a:pPr>
+              <a:defRPr sz="900" b="1" i="0">
+                <a:solidFill>
+                  <a:srgbClr val="3B82F6"/>
+                </a:solidFill>
+              </a:defRPr>
+            </a:pPr>
+            <a:endParaRPr lang="en-US" sz="4000" dirty="0">
+              <a:solidFill>
+                <a:srgbClr val="111827"/>
+              </a:solidFill>
+            </a:endParaRPr>
+          </a:p>
+          <a:p>
+            <a:pPr>
+              <a:defRPr sz="900" b="1" i="0">
+                <a:solidFill>
+                  <a:srgbClr val="3B82F6"/>
+                </a:solidFill>
+              </a:defRPr>
+            </a:pPr>
+            <a:endParaRPr lang="en-US" sz="4000" dirty="0">
+              <a:solidFill>
+                <a:srgbClr val="111827"/>
+              </a:solidFill>
+            </a:endParaRPr>
+          </a:p>
+          <a:p>
+            <a:pPr>
+              <a:defRPr sz="900" b="1" i="0">
+                <a:solidFill>
+                  <a:srgbClr val="3B82F6"/>
+                </a:solidFill>
+              </a:defRPr>
+            </a:pPr>
+            <a:r>
+              <a:rPr lang="en-US" sz="4000" dirty="0">
+                <a:solidFill>
+                  <a:srgbClr val="111827"/>
+                </a:solidFill>
+              </a:rPr>
+              <a:t>Continued…</a:t>
+            </a:r>
+            <a:endParaRPr lang="en-US" sz="4000" b="1" i="0" dirty="0">
+              <a:solidFill>
+                <a:srgbClr val="111827"/>
+              </a:solidFill>
+            </a:endParaRPr>
+          </a:p>
           <a:p>
             <a:pPr algn="l">
               <a:defRPr sz="900" b="1" i="0">
@@ -13027,14 +13018,39 @@
                 </a:solidFill>
               </a:defRPr>
             </a:pPr>
-            <a:r>
-              <a:rPr sz="900" b="1" i="0">
+            <a:endParaRPr lang="en-US" sz="4000" b="1" i="0" dirty="0">
+              <a:solidFill>
+                <a:srgbClr val="111827"/>
+              </a:solidFill>
+            </a:endParaRPr>
+          </a:p>
+          <a:p>
+            <a:pPr algn="l">
+              <a:defRPr sz="900" b="1" i="0">
                 <a:solidFill>
                   <a:srgbClr val="3B82F6"/>
                 </a:solidFill>
-              </a:rPr>
-              <a:t>RESULTS AND DISCUSSION</a:t>
-            </a:r>
+              </a:defRPr>
+            </a:pPr>
+            <a:endParaRPr lang="en-US" sz="4000" b="1" i="0" dirty="0">
+              <a:solidFill>
+                <a:srgbClr val="3B82F6"/>
+              </a:solidFill>
+            </a:endParaRPr>
+          </a:p>
+          <a:p>
+            <a:pPr algn="l">
+              <a:defRPr sz="900" b="1" i="0">
+                <a:solidFill>
+                  <a:srgbClr val="3B82F6"/>
+                </a:solidFill>
+              </a:defRPr>
+            </a:pPr>
+            <a:endParaRPr sz="4000" b="1" i="0" dirty="0">
+              <a:solidFill>
+                <a:srgbClr val="3B82F6"/>
+              </a:solidFill>
+            </a:endParaRPr>
           </a:p>
         </p:txBody>
       </p:sp>
@@ -13077,14 +13093,11 @@
                 </a:solidFill>
               </a:defRPr>
             </a:pPr>
-            <a:r>
-              <a:rPr sz="2850" b="0" i="0">
-                <a:solidFill>
-                  <a:srgbClr val="111827"/>
-                </a:solidFill>
-              </a:rPr>
-              <a:t>Constant f(x)=0 reproduces the X-axis boundary sensitivity</a:t>
-            </a:r>
+            <a:endParaRPr sz="2850" b="0" i="0" dirty="0">
+              <a:solidFill>
+                <a:srgbClr val="111827"/>
+              </a:solidFill>
+            </a:endParaRPr>
           </a:p>
         </p:txBody>
       </p:sp>
@@ -13138,7 +13151,7 @@
         <p:spPr>
           <a:xfrm>
             <a:off x="8248650" y="1638300"/>
-            <a:ext cx="3095625" cy="552450"/>
+            <a:ext cx="3314700" cy="552450"/>
           </a:xfrm>
           <a:prstGeom prst="rect">
             <a:avLst/>
@@ -13161,13 +13174,26 @@
               </a:defRPr>
             </a:pPr>
             <a:r>
-              <a:rPr sz="1650" b="1" i="0">
-                <a:solidFill>
-                  <a:srgbClr val="111827"/>
-                </a:solidFill>
-              </a:rPr>
-              <a:t>X-axis rotation · constant 0</a:t>
-            </a:r>
+              <a:rPr sz="1650" b="1" i="0" dirty="0">
+                <a:solidFill>
+                  <a:srgbClr val="111827"/>
+                </a:solidFill>
+              </a:rPr>
+              <a:t>X-axis rotation · </a:t>
+            </a:r>
+            <a:r>
+              <a:rPr lang="en-US" sz="1800" b="0" i="0" dirty="0">
+                <a:solidFill>
+                  <a:srgbClr val="111827"/>
+                </a:solidFill>
+              </a:rPr>
+              <a:t>Constant f(x)=0 </a:t>
+            </a:r>
+            <a:endParaRPr sz="1650" b="1" i="0" dirty="0">
+              <a:solidFill>
+                <a:srgbClr val="111827"/>
+              </a:solidFill>
+            </a:endParaRPr>
           </a:p>
         </p:txBody>
       </p:sp>
@@ -13737,21 +13763,85 @@
         </p:nvSpPr>
         <p:spPr>
           <a:xfrm>
-            <a:off x="609600" y="333375"/>
-            <a:ext cx="5715000" cy="228600"/>
-          </a:xfrm>
-          <a:prstGeom prst="rect">
-            <a:avLst/>
-          </a:prstGeom>
-          <a:noFill/>
-          <a:ln w="0">
-            <a:noFill/>
-            <a:prstDash val="solid"/>
-          </a:ln>
-        </p:spPr>
-        <p:txBody>
-          <a:bodyPr anchor="ctr"/>
-          <a:lstStyle/>
+            <a:off x="609600" y="333374"/>
+            <a:ext cx="5715000" cy="885825"/>
+          </a:xfrm>
+          <a:prstGeom prst="rect">
+            <a:avLst/>
+          </a:prstGeom>
+          <a:noFill/>
+          <a:ln w="0">
+            <a:noFill/>
+            <a:prstDash val="solid"/>
+          </a:ln>
+        </p:spPr>
+        <p:txBody>
+          <a:bodyPr anchor="ctr"/>
+          <a:lstStyle/>
+          <a:p>
+            <a:pPr>
+              <a:defRPr sz="900" b="1" i="0">
+                <a:solidFill>
+                  <a:srgbClr val="3B82F6"/>
+                </a:solidFill>
+              </a:defRPr>
+            </a:pPr>
+            <a:endParaRPr lang="en-US" sz="4000" dirty="0">
+              <a:solidFill>
+                <a:srgbClr val="111827"/>
+              </a:solidFill>
+            </a:endParaRPr>
+          </a:p>
+          <a:p>
+            <a:pPr>
+              <a:defRPr sz="900" b="1" i="0">
+                <a:solidFill>
+                  <a:srgbClr val="3B82F6"/>
+                </a:solidFill>
+              </a:defRPr>
+            </a:pPr>
+            <a:endParaRPr lang="en-US" sz="4000" dirty="0">
+              <a:solidFill>
+                <a:srgbClr val="111827"/>
+              </a:solidFill>
+            </a:endParaRPr>
+          </a:p>
+          <a:p>
+            <a:pPr>
+              <a:defRPr sz="900" b="1" i="0">
+                <a:solidFill>
+                  <a:srgbClr val="3B82F6"/>
+                </a:solidFill>
+              </a:defRPr>
+            </a:pPr>
+            <a:endParaRPr lang="en-US" sz="4000" dirty="0">
+              <a:solidFill>
+                <a:srgbClr val="111827"/>
+              </a:solidFill>
+            </a:endParaRPr>
+          </a:p>
+          <a:p>
+            <a:pPr>
+              <a:defRPr sz="900" b="1" i="0">
+                <a:solidFill>
+                  <a:srgbClr val="3B82F6"/>
+                </a:solidFill>
+              </a:defRPr>
+            </a:pPr>
+            <a:r>
+              <a:rPr lang="en-US" sz="4000" dirty="0">
+                <a:solidFill>
+                  <a:srgbClr val="111827"/>
+                </a:solidFill>
+              </a:rPr>
+              <a:t>Continued…</a:t>
+            </a:r>
+            <a:endParaRPr lang="en-US" sz="4000" b="1" i="0" dirty="0">
+              <a:solidFill>
+                <a:srgbClr val="111827"/>
+              </a:solidFill>
+            </a:endParaRPr>
+          </a:p>
           <a:p>
             <a:pPr algn="l">
               <a:defRPr sz="900" b="1" i="0">
@@ -13760,14 +13850,39 @@
                 </a:solidFill>
               </a:defRPr>
             </a:pPr>
-            <a:r>
-              <a:rPr sz="900" b="1" i="0">
+            <a:endParaRPr lang="en-US" sz="4000" b="1" i="0" dirty="0">
+              <a:solidFill>
+                <a:srgbClr val="111827"/>
+              </a:solidFill>
+            </a:endParaRPr>
+          </a:p>
+          <a:p>
+            <a:pPr algn="l">
+              <a:defRPr sz="900" b="1" i="0">
                 <a:solidFill>
                   <a:srgbClr val="3B82F6"/>
                 </a:solidFill>
-              </a:rPr>
-              <a:t>RESULTS AND DISCUSSION</a:t>
-            </a:r>
+              </a:defRPr>
+            </a:pPr>
+            <a:endParaRPr lang="en-US" sz="4000" b="1" i="0" dirty="0">
+              <a:solidFill>
+                <a:srgbClr val="3B82F6"/>
+              </a:solidFill>
+            </a:endParaRPr>
+          </a:p>
+          <a:p>
+            <a:pPr algn="l">
+              <a:defRPr sz="900" b="1" i="0">
+                <a:solidFill>
+                  <a:srgbClr val="3B82F6"/>
+                </a:solidFill>
+              </a:defRPr>
+            </a:pPr>
+            <a:endParaRPr sz="4000" b="1" i="0" dirty="0">
+              <a:solidFill>
+                <a:srgbClr val="3B82F6"/>
+              </a:solidFill>
+            </a:endParaRPr>
           </a:p>
         </p:txBody>
       </p:sp>
@@ -13810,14 +13925,11 @@
                 </a:solidFill>
               </a:defRPr>
             </a:pPr>
-            <a:r>
-              <a:rPr sz="2850" b="0" i="0">
-                <a:solidFill>
-                  <a:srgbClr val="111827"/>
-                </a:solidFill>
-              </a:rPr>
-              <a:t>Constant f(x)=0 reproduces the uniform Y-axis response</a:t>
-            </a:r>
+            <a:endParaRPr sz="2850" b="0" i="0" dirty="0">
+              <a:solidFill>
+                <a:srgbClr val="111827"/>
+              </a:solidFill>
+            </a:endParaRPr>
           </a:p>
         </p:txBody>
       </p:sp>
@@ -13837,8 +13949,8 @@
         </p:nvSpPr>
         <p:spPr>
           <a:xfrm>
-            <a:off x="8001000" y="1428750"/>
-            <a:ext cx="3562350" cy="4000500"/>
+            <a:off x="8001000" y="1540564"/>
+            <a:ext cx="3562350" cy="3888685"/>
           </a:xfrm>
           <a:prstGeom prst="roundRect">
             <a:avLst>
@@ -13894,13 +14006,26 @@
               </a:defRPr>
             </a:pPr>
             <a:r>
-              <a:rPr sz="1650" b="1" i="0">
-                <a:solidFill>
-                  <a:srgbClr val="111827"/>
-                </a:solidFill>
-              </a:rPr>
-              <a:t>Y-axis rotation · constant 0</a:t>
-            </a:r>
+              <a:rPr sz="1650" b="1" i="0" dirty="0">
+                <a:solidFill>
+                  <a:srgbClr val="111827"/>
+                </a:solidFill>
+              </a:rPr>
+              <a:t>Y-axis rotation · </a:t>
+            </a:r>
+            <a:r>
+              <a:rPr lang="en-US" sz="1800" b="0" i="0" dirty="0">
+                <a:solidFill>
+                  <a:srgbClr val="111827"/>
+                </a:solidFill>
+              </a:rPr>
+              <a:t>Constant f(x)=0 </a:t>
+            </a:r>
+            <a:endParaRPr sz="1650" b="1" i="0" dirty="0">
+              <a:solidFill>
+                <a:srgbClr val="111827"/>
+              </a:solidFill>
+            </a:endParaRPr>
           </a:p>
         </p:txBody>
       </p:sp>
@@ -14410,8 +14535,8 @@
         </p:blipFill>
         <p:spPr>
           <a:xfrm>
-            <a:off x="539249" y="1219200"/>
-            <a:ext cx="7242676" cy="4468755"/>
+            <a:off x="539249" y="1428750"/>
+            <a:ext cx="7242676" cy="4259205"/>
           </a:xfrm>
           <a:prstGeom prst="rect">
             <a:avLst/>
@@ -14472,21 +14597,85 @@
         </p:nvSpPr>
         <p:spPr>
           <a:xfrm>
-            <a:off x="609600" y="333375"/>
-            <a:ext cx="5715000" cy="228600"/>
-          </a:xfrm>
-          <a:prstGeom prst="rect">
-            <a:avLst/>
-          </a:prstGeom>
-          <a:noFill/>
-          <a:ln w="0">
-            <a:noFill/>
-            <a:prstDash val="solid"/>
-          </a:ln>
-        </p:spPr>
-        <p:txBody>
-          <a:bodyPr anchor="ctr"/>
-          <a:lstStyle/>
+            <a:off x="695738" y="218661"/>
+            <a:ext cx="5628861" cy="604630"/>
+          </a:xfrm>
+          <a:prstGeom prst="rect">
+            <a:avLst/>
+          </a:prstGeom>
+          <a:noFill/>
+          <a:ln w="0">
+            <a:noFill/>
+            <a:prstDash val="solid"/>
+          </a:ln>
+        </p:spPr>
+        <p:txBody>
+          <a:bodyPr anchor="ctr"/>
+          <a:lstStyle/>
+          <a:p>
+            <a:pPr>
+              <a:defRPr sz="900" b="1" i="0">
+                <a:solidFill>
+                  <a:srgbClr val="3B82F6"/>
+                </a:solidFill>
+              </a:defRPr>
+            </a:pPr>
+            <a:endParaRPr lang="en-US" sz="4000" dirty="0">
+              <a:solidFill>
+                <a:srgbClr val="111827"/>
+              </a:solidFill>
+            </a:endParaRPr>
+          </a:p>
+          <a:p>
+            <a:pPr>
+              <a:defRPr sz="900" b="1" i="0">
+                <a:solidFill>
+                  <a:srgbClr val="3B82F6"/>
+                </a:solidFill>
+              </a:defRPr>
+            </a:pPr>
+            <a:endParaRPr lang="en-US" sz="4000" dirty="0">
+              <a:solidFill>
+                <a:srgbClr val="111827"/>
+              </a:solidFill>
+            </a:endParaRPr>
+          </a:p>
+          <a:p>
+            <a:pPr>
+              <a:defRPr sz="900" b="1" i="0">
+                <a:solidFill>
+                  <a:srgbClr val="3B82F6"/>
+                </a:solidFill>
+              </a:defRPr>
+            </a:pPr>
+            <a:endParaRPr lang="en-US" sz="4000" dirty="0">
+              <a:solidFill>
+                <a:srgbClr val="111827"/>
+              </a:solidFill>
+            </a:endParaRPr>
+          </a:p>
+          <a:p>
+            <a:pPr>
+              <a:defRPr sz="900" b="1" i="0">
+                <a:solidFill>
+                  <a:srgbClr val="3B82F6"/>
+                </a:solidFill>
+              </a:defRPr>
+            </a:pPr>
+            <a:r>
+              <a:rPr lang="en-US" sz="4000" dirty="0">
+                <a:solidFill>
+                  <a:srgbClr val="111827"/>
+                </a:solidFill>
+              </a:rPr>
+              <a:t>Continued…</a:t>
+            </a:r>
+            <a:endParaRPr lang="en-US" sz="4000" b="1" i="0" dirty="0">
+              <a:solidFill>
+                <a:srgbClr val="111827"/>
+              </a:solidFill>
+            </a:endParaRPr>
+          </a:p>
           <a:p>
             <a:pPr algn="l">
               <a:defRPr sz="900" b="1" i="0">
@@ -14495,14 +14684,39 @@
                 </a:solidFill>
               </a:defRPr>
             </a:pPr>
-            <a:r>
-              <a:rPr sz="900" b="1" i="0">
+            <a:endParaRPr lang="en-US" sz="4000" b="1" i="0" dirty="0">
+              <a:solidFill>
+                <a:srgbClr val="111827"/>
+              </a:solidFill>
+            </a:endParaRPr>
+          </a:p>
+          <a:p>
+            <a:pPr algn="l">
+              <a:defRPr sz="900" b="1" i="0">
                 <a:solidFill>
                   <a:srgbClr val="3B82F6"/>
                 </a:solidFill>
-              </a:rPr>
-              <a:t>RESULTS AND DISCUSSION</a:t>
-            </a:r>
+              </a:defRPr>
+            </a:pPr>
+            <a:endParaRPr lang="en-US" sz="4000" b="1" i="0" dirty="0">
+              <a:solidFill>
+                <a:srgbClr val="3B82F6"/>
+              </a:solidFill>
+            </a:endParaRPr>
+          </a:p>
+          <a:p>
+            <a:pPr algn="l">
+              <a:defRPr sz="900" b="1" i="0">
+                <a:solidFill>
+                  <a:srgbClr val="3B82F6"/>
+                </a:solidFill>
+              </a:defRPr>
+            </a:pPr>
+            <a:endParaRPr sz="4000" b="1" i="0" dirty="0">
+              <a:solidFill>
+                <a:srgbClr val="3B82F6"/>
+              </a:solidFill>
+            </a:endParaRPr>
           </a:p>
         </p:txBody>
       </p:sp>
@@ -14522,8 +14736,8 @@
         </p:nvSpPr>
         <p:spPr>
           <a:xfrm>
-            <a:off x="609600" y="552450"/>
-            <a:ext cx="10953750" cy="666750"/>
+            <a:off x="609600" y="4461014"/>
+            <a:ext cx="10273748" cy="1104899"/>
           </a:xfrm>
           <a:prstGeom prst="rect">
             <a:avLst/>
@@ -14546,7 +14760,7 @@
               </a:defRPr>
             </a:pPr>
             <a:r>
-              <a:rPr sz="2850" b="0" i="0">
+              <a:rPr sz="2850" b="0" i="0" dirty="0">
                 <a:solidFill>
                   <a:srgbClr val="111827"/>
                 </a:solidFill>
@@ -14573,7 +14787,7 @@
         <p:spPr>
           <a:xfrm>
             <a:off x="8020050" y="1428750"/>
-            <a:ext cx="3562350" cy="4000500"/>
+            <a:ext cx="3562350" cy="2822714"/>
           </a:xfrm>
           <a:prstGeom prst="roundRect">
             <a:avLst>
@@ -15108,8 +15322,8 @@
         </p:blipFill>
         <p:spPr>
           <a:xfrm>
-            <a:off x="146242" y="1675474"/>
-            <a:ext cx="7242676" cy="3773751"/>
+            <a:off x="1035791" y="1162878"/>
+            <a:ext cx="6527059" cy="3161472"/>
           </a:xfrm>
           <a:prstGeom prst="rect">
             <a:avLst/>
@@ -15170,8 +15384,8 @@
         </p:nvSpPr>
         <p:spPr>
           <a:xfrm>
-            <a:off x="609600" y="333375"/>
-            <a:ext cx="5715000" cy="228600"/>
+            <a:off x="609600" y="313497"/>
+            <a:ext cx="5715000" cy="590964"/>
           </a:xfrm>
           <a:prstGeom prst="rect">
             <a:avLst/>
@@ -15194,13 +15408,18 @@
               </a:defRPr>
             </a:pPr>
             <a:r>
-              <a:rPr lang="en-US" sz="900" b="1" i="0" dirty="0">
-                <a:solidFill>
-                  <a:srgbClr val="3B82F6"/>
-                </a:solidFill>
-              </a:rPr>
-              <a:t>Motivation</a:t>
-            </a:r>
+              <a:rPr lang="en-US" sz="4000" dirty="0">
+                <a:solidFill>
+                  <a:srgbClr val="111827"/>
+                </a:solidFill>
+              </a:rPr>
+              <a:t>Motivation of the Study</a:t>
+            </a:r>
+            <a:endParaRPr lang="en-US" sz="4000" b="1" i="0" dirty="0">
+              <a:solidFill>
+                <a:srgbClr val="111827"/>
+              </a:solidFill>
+            </a:endParaRPr>
           </a:p>
         </p:txBody>
       </p:sp>
@@ -15220,8 +15439,8 @@
         </p:nvSpPr>
         <p:spPr>
           <a:xfrm>
-            <a:off x="609600" y="552450"/>
-            <a:ext cx="10953750" cy="666750"/>
+            <a:off x="609600" y="809624"/>
+            <a:ext cx="10953750" cy="704849"/>
           </a:xfrm>
           <a:prstGeom prst="rect">
             <a:avLst/>
@@ -15270,8 +15489,8 @@
         </p:nvSpPr>
         <p:spPr>
           <a:xfrm>
-            <a:off x="609600" y="1571625"/>
-            <a:ext cx="5238750" cy="3857625"/>
+            <a:off x="514350" y="1782003"/>
+            <a:ext cx="5238750" cy="2600325"/>
           </a:xfrm>
           <a:prstGeom prst="roundRect">
             <a:avLst>
@@ -15286,6 +15505,13 @@
             <a:prstDash val="solid"/>
           </a:ln>
         </p:spPr>
+        <p:txBody>
+          <a:bodyPr/>
+          <a:lstStyle/>
+          <a:p>
+            <a:endParaRPr lang="en-US" dirty="0"/>
+          </a:p>
+        </p:txBody>
       </p:sp>
       <p:sp>
         <p:nvSpPr>
@@ -15303,8 +15529,8 @@
         </p:nvSpPr>
         <p:spPr>
           <a:xfrm>
-            <a:off x="6076950" y="1571625"/>
-            <a:ext cx="5505450" cy="3857625"/>
+            <a:off x="6076950" y="1762124"/>
+            <a:ext cx="5505450" cy="2600325"/>
           </a:xfrm>
           <a:prstGeom prst="roundRect">
             <a:avLst>
@@ -15465,7 +15691,23 @@
                   <a:srgbClr val="111827"/>
                 </a:solidFill>
               </a:rPr>
-              <a:t>Quantum algorithms depend on precise gates and phase-sensitive interference.</a:t>
+              <a:t>Quantum algorithms depend on precise gates </a:t>
+            </a:r>
+            <a:r>
+              <a:rPr lang="en-US" sz="1500" dirty="0" err="1">
+                <a:solidFill>
+                  <a:srgbClr val="111827"/>
+                </a:solidFill>
+              </a:rPr>
+              <a:t>oprtsations</a:t>
+            </a:r>
+            <a:r>
+              <a:rPr sz="1500" b="0" i="0" dirty="0">
+                <a:solidFill>
+                  <a:srgbClr val="111827"/>
+                </a:solidFill>
+              </a:rPr>
+              <a:t>.</a:t>
             </a:r>
           </a:p>
         </p:txBody>
@@ -15970,8 +16212,8 @@
           </a:p>
         </p:txBody>
       </p:sp>
-      <mc:AlternateContent xmlns:mc="http://schemas.openxmlformats.org/markup-compatibility/2006">
-        <mc:Choice xmlns:a14="http://schemas.microsoft.com/office/drawing/2010/main" Requires="a14">
+      <mc:AlternateContent xmlns:mc="http://schemas.openxmlformats.org/markup-compatibility/2006" xmlns:a14="http://schemas.microsoft.com/office/drawing/2010/main">
+        <mc:Choice Requires="a14">
           <p:sp>
             <p:nvSpPr>
               <p:cNvPr id="18" name="text">
@@ -16075,7 +16317,7 @@
             </p:txBody>
           </p:sp>
         </mc:Choice>
-        <mc:Fallback>
+        <mc:Fallback xmlns="">
           <p:sp>
             <p:nvSpPr>
               <p:cNvPr id="18" name="text">
@@ -16361,21 +16603,85 @@
         </p:nvSpPr>
         <p:spPr>
           <a:xfrm>
-            <a:off x="609600" y="333375"/>
-            <a:ext cx="5715000" cy="228600"/>
-          </a:xfrm>
-          <a:prstGeom prst="rect">
-            <a:avLst/>
-          </a:prstGeom>
-          <a:noFill/>
-          <a:ln w="0">
-            <a:noFill/>
-            <a:prstDash val="solid"/>
-          </a:ln>
-        </p:spPr>
-        <p:txBody>
-          <a:bodyPr anchor="ctr"/>
-          <a:lstStyle/>
+            <a:off x="609600" y="178904"/>
+            <a:ext cx="5715000" cy="745435"/>
+          </a:xfrm>
+          <a:prstGeom prst="rect">
+            <a:avLst/>
+          </a:prstGeom>
+          <a:noFill/>
+          <a:ln w="0">
+            <a:noFill/>
+            <a:prstDash val="solid"/>
+          </a:ln>
+        </p:spPr>
+        <p:txBody>
+          <a:bodyPr anchor="ctr"/>
+          <a:lstStyle/>
+          <a:p>
+            <a:pPr>
+              <a:defRPr sz="900" b="1" i="0">
+                <a:solidFill>
+                  <a:srgbClr val="3B82F6"/>
+                </a:solidFill>
+              </a:defRPr>
+            </a:pPr>
+            <a:endParaRPr lang="en-US" sz="4000" dirty="0">
+              <a:solidFill>
+                <a:srgbClr val="111827"/>
+              </a:solidFill>
+            </a:endParaRPr>
+          </a:p>
+          <a:p>
+            <a:pPr>
+              <a:defRPr sz="900" b="1" i="0">
+                <a:solidFill>
+                  <a:srgbClr val="3B82F6"/>
+                </a:solidFill>
+              </a:defRPr>
+            </a:pPr>
+            <a:endParaRPr lang="en-US" sz="4000" dirty="0">
+              <a:solidFill>
+                <a:srgbClr val="111827"/>
+              </a:solidFill>
+            </a:endParaRPr>
+          </a:p>
+          <a:p>
+            <a:pPr>
+              <a:defRPr sz="900" b="1" i="0">
+                <a:solidFill>
+                  <a:srgbClr val="3B82F6"/>
+                </a:solidFill>
+              </a:defRPr>
+            </a:pPr>
+            <a:endParaRPr lang="en-US" sz="4000" dirty="0">
+              <a:solidFill>
+                <a:srgbClr val="111827"/>
+              </a:solidFill>
+            </a:endParaRPr>
+          </a:p>
+          <a:p>
+            <a:pPr>
+              <a:defRPr sz="900" b="1" i="0">
+                <a:solidFill>
+                  <a:srgbClr val="3B82F6"/>
+                </a:solidFill>
+              </a:defRPr>
+            </a:pPr>
+            <a:r>
+              <a:rPr lang="en-US" sz="4000" dirty="0">
+                <a:solidFill>
+                  <a:srgbClr val="111827"/>
+                </a:solidFill>
+              </a:rPr>
+              <a:t>Continued…</a:t>
+            </a:r>
+            <a:endParaRPr lang="en-US" sz="4000" b="1" i="0" dirty="0">
+              <a:solidFill>
+                <a:srgbClr val="111827"/>
+              </a:solidFill>
+            </a:endParaRPr>
+          </a:p>
           <a:p>
             <a:pPr algn="l">
               <a:defRPr sz="900" b="1" i="0">
@@ -16384,14 +16690,39 @@
                 </a:solidFill>
               </a:defRPr>
             </a:pPr>
-            <a:r>
-              <a:rPr sz="900" b="1" i="0">
+            <a:endParaRPr lang="en-US" sz="4000" b="1" i="0" dirty="0">
+              <a:solidFill>
+                <a:srgbClr val="111827"/>
+              </a:solidFill>
+            </a:endParaRPr>
+          </a:p>
+          <a:p>
+            <a:pPr algn="l">
+              <a:defRPr sz="900" b="1" i="0">
                 <a:solidFill>
                   <a:srgbClr val="3B82F6"/>
                 </a:solidFill>
-              </a:rPr>
-              <a:t>RESULTS AND DISCUSSION</a:t>
-            </a:r>
+              </a:defRPr>
+            </a:pPr>
+            <a:endParaRPr lang="en-US" sz="4000" b="1" i="0" dirty="0">
+              <a:solidFill>
+                <a:srgbClr val="3B82F6"/>
+              </a:solidFill>
+            </a:endParaRPr>
+          </a:p>
+          <a:p>
+            <a:pPr algn="l">
+              <a:defRPr sz="900" b="1" i="0">
+                <a:solidFill>
+                  <a:srgbClr val="3B82F6"/>
+                </a:solidFill>
+              </a:defRPr>
+            </a:pPr>
+            <a:endParaRPr sz="4000" b="1" i="0" dirty="0">
+              <a:solidFill>
+                <a:srgbClr val="3B82F6"/>
+              </a:solidFill>
+            </a:endParaRPr>
           </a:p>
         </p:txBody>
       </p:sp>
@@ -16411,8 +16742,8 @@
         </p:nvSpPr>
         <p:spPr>
           <a:xfrm>
-            <a:off x="609600" y="552450"/>
-            <a:ext cx="10953750" cy="666750"/>
+            <a:off x="387626" y="5000625"/>
+            <a:ext cx="8127724" cy="809625"/>
           </a:xfrm>
           <a:prstGeom prst="rect">
             <a:avLst/>
@@ -16434,14 +16765,11 @@
                 </a:solidFill>
               </a:defRPr>
             </a:pPr>
-            <a:r>
-              <a:rPr sz="2850" b="0" i="0">
-                <a:solidFill>
-                  <a:srgbClr val="111827"/>
-                </a:solidFill>
-              </a:rPr>
-              <a:t>Balanced parity remains classified under X rotations</a:t>
-            </a:r>
+            <a:endParaRPr sz="2850" b="0" i="0" dirty="0">
+              <a:solidFill>
+                <a:srgbClr val="111827"/>
+              </a:solidFill>
+            </a:endParaRPr>
           </a:p>
         </p:txBody>
       </p:sp>
@@ -16459,8 +16787,8 @@
         </p:blipFill>
         <p:spPr>
           <a:xfrm>
-            <a:off x="495300" y="1385738"/>
-            <a:ext cx="7239000" cy="4467524"/>
+            <a:off x="847724" y="1428748"/>
+            <a:ext cx="6391275" cy="3829051"/>
           </a:xfrm>
           <a:prstGeom prst="rect">
             <a:avLst/>
@@ -16484,7 +16812,7 @@
         <p:spPr>
           <a:xfrm>
             <a:off x="8020050" y="1428750"/>
-            <a:ext cx="3562350" cy="4000500"/>
+            <a:ext cx="3562350" cy="3790950"/>
           </a:xfrm>
           <a:prstGeom prst="roundRect">
             <a:avLst>
@@ -17051,21 +17379,85 @@
         </p:nvSpPr>
         <p:spPr>
           <a:xfrm>
-            <a:off x="609600" y="333375"/>
-            <a:ext cx="5715000" cy="228600"/>
-          </a:xfrm>
-          <a:prstGeom prst="rect">
-            <a:avLst/>
-          </a:prstGeom>
-          <a:noFill/>
-          <a:ln w="0">
-            <a:noFill/>
-            <a:prstDash val="solid"/>
-          </a:ln>
-        </p:spPr>
-        <p:txBody>
-          <a:bodyPr anchor="ctr"/>
-          <a:lstStyle/>
+            <a:off x="609600" y="188843"/>
+            <a:ext cx="5715000" cy="894522"/>
+          </a:xfrm>
+          <a:prstGeom prst="rect">
+            <a:avLst/>
+          </a:prstGeom>
+          <a:noFill/>
+          <a:ln w="0">
+            <a:noFill/>
+            <a:prstDash val="solid"/>
+          </a:ln>
+        </p:spPr>
+        <p:txBody>
+          <a:bodyPr anchor="ctr"/>
+          <a:lstStyle/>
+          <a:p>
+            <a:pPr>
+              <a:defRPr sz="900" b="1" i="0">
+                <a:solidFill>
+                  <a:srgbClr val="3B82F6"/>
+                </a:solidFill>
+              </a:defRPr>
+            </a:pPr>
+            <a:endParaRPr lang="en-US" sz="4000" dirty="0">
+              <a:solidFill>
+                <a:srgbClr val="111827"/>
+              </a:solidFill>
+            </a:endParaRPr>
+          </a:p>
+          <a:p>
+            <a:pPr>
+              <a:defRPr sz="900" b="1" i="0">
+                <a:solidFill>
+                  <a:srgbClr val="3B82F6"/>
+                </a:solidFill>
+              </a:defRPr>
+            </a:pPr>
+            <a:endParaRPr lang="en-US" sz="4000" dirty="0">
+              <a:solidFill>
+                <a:srgbClr val="111827"/>
+              </a:solidFill>
+            </a:endParaRPr>
+          </a:p>
+          <a:p>
+            <a:pPr>
+              <a:defRPr sz="900" b="1" i="0">
+                <a:solidFill>
+                  <a:srgbClr val="3B82F6"/>
+                </a:solidFill>
+              </a:defRPr>
+            </a:pPr>
+            <a:endParaRPr lang="en-US" sz="4000" dirty="0">
+              <a:solidFill>
+                <a:srgbClr val="111827"/>
+              </a:solidFill>
+            </a:endParaRPr>
+          </a:p>
+          <a:p>
+            <a:pPr>
+              <a:defRPr sz="900" b="1" i="0">
+                <a:solidFill>
+                  <a:srgbClr val="3B82F6"/>
+                </a:solidFill>
+              </a:defRPr>
+            </a:pPr>
+            <a:r>
+              <a:rPr lang="en-US" sz="4000" dirty="0">
+                <a:solidFill>
+                  <a:srgbClr val="111827"/>
+                </a:solidFill>
+              </a:rPr>
+              <a:t>Continued…</a:t>
+            </a:r>
+            <a:endParaRPr lang="en-US" sz="4000" b="1" i="0" dirty="0">
+              <a:solidFill>
+                <a:srgbClr val="111827"/>
+              </a:solidFill>
+            </a:endParaRPr>
+          </a:p>
           <a:p>
             <a:pPr algn="l">
               <a:defRPr sz="900" b="1" i="0">
@@ -17074,14 +17466,39 @@
                 </a:solidFill>
               </a:defRPr>
             </a:pPr>
-            <a:r>
-              <a:rPr sz="900" b="1" i="0">
+            <a:endParaRPr lang="en-US" sz="4000" b="1" i="0" dirty="0">
+              <a:solidFill>
+                <a:srgbClr val="111827"/>
+              </a:solidFill>
+            </a:endParaRPr>
+          </a:p>
+          <a:p>
+            <a:pPr algn="l">
+              <a:defRPr sz="900" b="1" i="0">
                 <a:solidFill>
                   <a:srgbClr val="3B82F6"/>
                 </a:solidFill>
-              </a:rPr>
-              <a:t>RESULTS AND DISCUSSION</a:t>
-            </a:r>
+              </a:defRPr>
+            </a:pPr>
+            <a:endParaRPr lang="en-US" sz="4000" b="1" i="0" dirty="0">
+              <a:solidFill>
+                <a:srgbClr val="3B82F6"/>
+              </a:solidFill>
+            </a:endParaRPr>
+          </a:p>
+          <a:p>
+            <a:pPr algn="l">
+              <a:defRPr sz="900" b="1" i="0">
+                <a:solidFill>
+                  <a:srgbClr val="3B82F6"/>
+                </a:solidFill>
+              </a:defRPr>
+            </a:pPr>
+            <a:endParaRPr sz="4000" b="1" i="0" dirty="0">
+              <a:solidFill>
+                <a:srgbClr val="3B82F6"/>
+              </a:solidFill>
+            </a:endParaRPr>
           </a:p>
         </p:txBody>
       </p:sp>
@@ -17124,14 +17541,11 @@
                 </a:solidFill>
               </a:defRPr>
             </a:pPr>
-            <a:r>
-              <a:rPr sz="2850" b="0" i="0">
-                <a:solidFill>
-                  <a:srgbClr val="111827"/>
-                </a:solidFill>
-              </a:rPr>
-              <a:t>Balanced parity remains classified under Y rotations</a:t>
-            </a:r>
+            <a:endParaRPr sz="2850" b="0" i="0" dirty="0">
+              <a:solidFill>
+                <a:srgbClr val="111827"/>
+              </a:solidFill>
+            </a:endParaRPr>
           </a:p>
         </p:txBody>
       </p:sp>
@@ -17750,20 +18164,84 @@
         <p:spPr>
           <a:xfrm>
             <a:off x="609600" y="333375"/>
-            <a:ext cx="5715000" cy="228600"/>
-          </a:xfrm>
-          <a:prstGeom prst="rect">
-            <a:avLst/>
-          </a:prstGeom>
-          <a:noFill/>
-          <a:ln w="0">
-            <a:noFill/>
-            <a:prstDash val="solid"/>
-          </a:ln>
-        </p:spPr>
-        <p:txBody>
-          <a:bodyPr anchor="ctr"/>
-          <a:lstStyle/>
+            <a:ext cx="5715000" cy="885825"/>
+          </a:xfrm>
+          <a:prstGeom prst="rect">
+            <a:avLst/>
+          </a:prstGeom>
+          <a:noFill/>
+          <a:ln w="0">
+            <a:noFill/>
+            <a:prstDash val="solid"/>
+          </a:ln>
+        </p:spPr>
+        <p:txBody>
+          <a:bodyPr anchor="ctr"/>
+          <a:lstStyle/>
+          <a:p>
+            <a:pPr>
+              <a:defRPr sz="900" b="1" i="0">
+                <a:solidFill>
+                  <a:srgbClr val="3B82F6"/>
+                </a:solidFill>
+              </a:defRPr>
+            </a:pPr>
+            <a:endParaRPr lang="en-US" sz="4000" dirty="0">
+              <a:solidFill>
+                <a:srgbClr val="111827"/>
+              </a:solidFill>
+            </a:endParaRPr>
+          </a:p>
+          <a:p>
+            <a:pPr>
+              <a:defRPr sz="900" b="1" i="0">
+                <a:solidFill>
+                  <a:srgbClr val="3B82F6"/>
+                </a:solidFill>
+              </a:defRPr>
+            </a:pPr>
+            <a:endParaRPr lang="en-US" sz="4000" dirty="0">
+              <a:solidFill>
+                <a:srgbClr val="111827"/>
+              </a:solidFill>
+            </a:endParaRPr>
+          </a:p>
+          <a:p>
+            <a:pPr>
+              <a:defRPr sz="900" b="1" i="0">
+                <a:solidFill>
+                  <a:srgbClr val="3B82F6"/>
+                </a:solidFill>
+              </a:defRPr>
+            </a:pPr>
+            <a:endParaRPr lang="en-US" sz="4000" dirty="0">
+              <a:solidFill>
+                <a:srgbClr val="111827"/>
+              </a:solidFill>
+            </a:endParaRPr>
+          </a:p>
+          <a:p>
+            <a:pPr>
+              <a:defRPr sz="900" b="1" i="0">
+                <a:solidFill>
+                  <a:srgbClr val="3B82F6"/>
+                </a:solidFill>
+              </a:defRPr>
+            </a:pPr>
+            <a:r>
+              <a:rPr lang="en-US" sz="4000" dirty="0">
+                <a:solidFill>
+                  <a:srgbClr val="111827"/>
+                </a:solidFill>
+              </a:rPr>
+              <a:t>Continued…</a:t>
+            </a:r>
+            <a:endParaRPr lang="en-US" sz="4000" b="1" i="0" dirty="0">
+              <a:solidFill>
+                <a:srgbClr val="111827"/>
+              </a:solidFill>
+            </a:endParaRPr>
+          </a:p>
           <a:p>
             <a:pPr algn="l">
               <a:defRPr sz="900" b="1" i="0">
@@ -17772,14 +18250,39 @@
                 </a:solidFill>
               </a:defRPr>
             </a:pPr>
-            <a:r>
-              <a:rPr sz="900" b="1" i="0">
+            <a:endParaRPr lang="en-US" sz="4000" b="1" i="0" dirty="0">
+              <a:solidFill>
+                <a:srgbClr val="111827"/>
+              </a:solidFill>
+            </a:endParaRPr>
+          </a:p>
+          <a:p>
+            <a:pPr algn="l">
+              <a:defRPr sz="900" b="1" i="0">
                 <a:solidFill>
                   <a:srgbClr val="3B82F6"/>
                 </a:solidFill>
-              </a:rPr>
-              <a:t>RESULTS AND DISCUSSION</a:t>
-            </a:r>
+              </a:defRPr>
+            </a:pPr>
+            <a:endParaRPr lang="en-US" sz="4000" b="1" i="0" dirty="0">
+              <a:solidFill>
+                <a:srgbClr val="3B82F6"/>
+              </a:solidFill>
+            </a:endParaRPr>
+          </a:p>
+          <a:p>
+            <a:pPr algn="l">
+              <a:defRPr sz="900" b="1" i="0">
+                <a:solidFill>
+                  <a:srgbClr val="3B82F6"/>
+                </a:solidFill>
+              </a:defRPr>
+            </a:pPr>
+            <a:endParaRPr sz="4000" b="1" i="0" dirty="0">
+              <a:solidFill>
+                <a:srgbClr val="3B82F6"/>
+              </a:solidFill>
+            </a:endParaRPr>
           </a:p>
         </p:txBody>
       </p:sp>
@@ -17799,7 +18302,7 @@
         </p:nvSpPr>
         <p:spPr>
           <a:xfrm>
-            <a:off x="609600" y="552450"/>
+            <a:off x="609600" y="572536"/>
             <a:ext cx="10953750" cy="666750"/>
           </a:xfrm>
           <a:prstGeom prst="rect">
@@ -17822,14 +18325,11 @@
                 </a:solidFill>
               </a:defRPr>
             </a:pPr>
-            <a:r>
-              <a:rPr sz="2850" b="0" i="0">
-                <a:solidFill>
-                  <a:srgbClr val="111827"/>
-                </a:solidFill>
-              </a:rPr>
-              <a:t>Z rotations preserve the balanced classification</a:t>
-            </a:r>
+            <a:endParaRPr sz="2850" b="0" i="0" dirty="0">
+              <a:solidFill>
+                <a:srgbClr val="111827"/>
+              </a:solidFill>
+            </a:endParaRPr>
           </a:p>
         </p:txBody>
       </p:sp>
@@ -17849,8 +18349,8 @@
         </p:nvSpPr>
         <p:spPr>
           <a:xfrm>
-            <a:off x="8020050" y="1428750"/>
-            <a:ext cx="3562350" cy="4000500"/>
+            <a:off x="8001000" y="1638300"/>
+            <a:ext cx="3562350" cy="3581400"/>
           </a:xfrm>
           <a:prstGeom prst="roundRect">
             <a:avLst>
@@ -17906,7 +18406,7 @@
               </a:defRPr>
             </a:pPr>
             <a:r>
-              <a:rPr sz="1650" b="1" i="0">
+              <a:rPr sz="1650" b="1" i="0" dirty="0">
                 <a:solidFill>
                   <a:srgbClr val="111827"/>
                 </a:solidFill>
@@ -18338,8 +18838,8 @@
         </p:blipFill>
         <p:spPr>
           <a:xfrm>
-            <a:off x="680359" y="1319601"/>
-            <a:ext cx="6626926" cy="4218798"/>
+            <a:off x="680359" y="1537899"/>
+            <a:ext cx="6626926" cy="4000500"/>
           </a:xfrm>
           <a:prstGeom prst="rect">
             <a:avLst/>
@@ -18400,8 +18900,8 @@
         </p:nvSpPr>
         <p:spPr>
           <a:xfrm>
-            <a:off x="609600" y="333375"/>
-            <a:ext cx="5715000" cy="228600"/>
+            <a:off x="609600" y="190499"/>
+            <a:ext cx="9289774" cy="783536"/>
           </a:xfrm>
           <a:prstGeom prst="rect">
             <a:avLst/>
@@ -18424,12 +18924,44 @@
               </a:defRPr>
             </a:pPr>
             <a:r>
-              <a:rPr sz="900" b="1" i="0">
-                <a:solidFill>
-                  <a:srgbClr val="3B82F6"/>
-                </a:solidFill>
-              </a:rPr>
-              <a:t>CROSS-RESULT SYNTHESIS</a:t>
+              <a:rPr sz="4000" b="1" i="0" dirty="0">
+                <a:solidFill>
+                  <a:srgbClr val="111827"/>
+                </a:solidFill>
+              </a:rPr>
+              <a:t>C</a:t>
+            </a:r>
+            <a:r>
+              <a:rPr lang="en-US" sz="4000" b="1" dirty="0">
+                <a:solidFill>
+                  <a:srgbClr val="111827"/>
+                </a:solidFill>
+              </a:rPr>
+              <a:t>ross</a:t>
+            </a:r>
+            <a:r>
+              <a:rPr sz="4000" b="1" i="0" dirty="0">
+                <a:solidFill>
+                  <a:srgbClr val="111827"/>
+                </a:solidFill>
+              </a:rPr>
+              <a:t>-R</a:t>
+            </a:r>
+            <a:r>
+              <a:rPr lang="en-US" sz="4000" b="1" i="0" dirty="0">
+                <a:solidFill>
+                  <a:srgbClr val="111827"/>
+                </a:solidFill>
+              </a:rPr>
+              <a:t>esult</a:t>
+            </a:r>
+            <a:r>
+              <a:rPr sz="4000" b="1" i="0" dirty="0">
+                <a:solidFill>
+                  <a:srgbClr val="111827"/>
+                </a:solidFill>
+              </a:rPr>
+              <a:t> </a:t>
             </a:r>
           </a:p>
         </p:txBody>
@@ -18450,8 +18982,8 @@
         </p:nvSpPr>
         <p:spPr>
           <a:xfrm>
-            <a:off x="609600" y="552450"/>
-            <a:ext cx="10953750" cy="666750"/>
+            <a:off x="609600" y="857250"/>
+            <a:ext cx="10953750" cy="714374"/>
           </a:xfrm>
           <a:prstGeom prst="rect">
             <a:avLst/>
@@ -18474,7 +19006,7 @@
               </a:defRPr>
             </a:pPr>
             <a:r>
-              <a:rPr sz="2850" b="0" i="0">
+              <a:rPr sz="2850" b="0" i="0" dirty="0">
                 <a:solidFill>
                   <a:srgbClr val="111827"/>
                 </a:solidFill>
@@ -19510,8 +20042,8 @@
           </a:p>
         </p:txBody>
       </p:sp>
-      <mc:AlternateContent xmlns:mc="http://schemas.openxmlformats.org/markup-compatibility/2006">
-        <mc:Choice xmlns:a14="http://schemas.microsoft.com/office/drawing/2010/main" Requires="a14">
+      <mc:AlternateContent xmlns:mc="http://schemas.openxmlformats.org/markup-compatibility/2006" xmlns:a14="http://schemas.microsoft.com/office/drawing/2010/main">
+        <mc:Choice Requires="a14">
           <p:sp>
             <p:nvSpPr>
               <p:cNvPr id="26" name="text">
@@ -19556,7 +20088,7 @@
                     <m:sSub>
                       <m:sSubPr>
                         <m:ctrlPr>
-                          <a:rPr lang="ar-AE" sz="2100" b="1" smtClean="0">
+                          <a:rPr lang="ar-AE" sz="2100" b="1" i="1" smtClean="0">
                             <a:solidFill>
                               <a:srgbClr val="2E9E69"/>
                             </a:solidFill>
@@ -19623,7 +20155,7 @@
             </p:txBody>
           </p:sp>
         </mc:Choice>
-        <mc:Fallback>
+        <mc:Fallback xmlns="">
           <p:sp>
             <p:nvSpPr>
               <p:cNvPr id="26" name="text">
@@ -20241,8 +20773,8 @@
         </p:nvSpPr>
         <p:spPr>
           <a:xfrm>
-            <a:off x="609600" y="333375"/>
-            <a:ext cx="5715000" cy="228600"/>
+            <a:off x="609600" y="85724"/>
+            <a:ext cx="8444948" cy="771525"/>
           </a:xfrm>
           <a:prstGeom prst="rect">
             <a:avLst/>
@@ -20265,13 +20797,58 @@
               </a:defRPr>
             </a:pPr>
             <a:r>
-              <a:rPr sz="900" b="1" i="0">
-                <a:solidFill>
-                  <a:srgbClr val="3B82F6"/>
-                </a:solidFill>
-              </a:rPr>
-              <a:t>SCOPE AND LIMITATIONS</a:t>
-            </a:r>
+              <a:rPr sz="4000" b="1" i="0" dirty="0">
+                <a:solidFill>
+                  <a:srgbClr val="111827"/>
+                </a:solidFill>
+              </a:rPr>
+              <a:t>S</a:t>
+            </a:r>
+            <a:r>
+              <a:rPr lang="en-US" sz="4000" b="1" i="0" dirty="0">
+                <a:solidFill>
+                  <a:srgbClr val="111827"/>
+                </a:solidFill>
+              </a:rPr>
+              <a:t>cope</a:t>
+            </a:r>
+            <a:r>
+              <a:rPr sz="4000" b="1" i="0" dirty="0">
+                <a:solidFill>
+                  <a:srgbClr val="111827"/>
+                </a:solidFill>
+              </a:rPr>
+              <a:t> </a:t>
+            </a:r>
+            <a:r>
+              <a:rPr lang="en-US" sz="4000" b="1" i="0" dirty="0">
+                <a:solidFill>
+                  <a:srgbClr val="111827"/>
+                </a:solidFill>
+              </a:rPr>
+              <a:t>and </a:t>
+            </a:r>
+            <a:r>
+              <a:rPr sz="4000" b="1" i="0" dirty="0">
+                <a:solidFill>
+                  <a:srgbClr val="111827"/>
+                </a:solidFill>
+              </a:rPr>
+              <a:t> L</a:t>
+            </a:r>
+            <a:r>
+              <a:rPr lang="en-US" sz="4000" b="1" i="0" dirty="0">
+                <a:solidFill>
+                  <a:srgbClr val="111827"/>
+                </a:solidFill>
+              </a:rPr>
+              <a:t>imitations </a:t>
+            </a:r>
+            <a:endParaRPr sz="4000" b="1" i="0" dirty="0">
+              <a:solidFill>
+                <a:srgbClr val="111827"/>
+              </a:solidFill>
+            </a:endParaRPr>
           </a:p>
         </p:txBody>
       </p:sp>
@@ -20291,8 +20868,8 @@
         </p:nvSpPr>
         <p:spPr>
           <a:xfrm>
-            <a:off x="609600" y="552450"/>
-            <a:ext cx="10953750" cy="666750"/>
+            <a:off x="609600" y="857250"/>
+            <a:ext cx="10953750" cy="600074"/>
           </a:xfrm>
           <a:prstGeom prst="rect">
             <a:avLst/>
@@ -21385,8 +21962,8 @@
         </p:nvSpPr>
         <p:spPr>
           <a:xfrm>
-            <a:off x="609600" y="296053"/>
-            <a:ext cx="5715000" cy="228600"/>
+            <a:off x="609600" y="139148"/>
+            <a:ext cx="5715000" cy="765725"/>
           </a:xfrm>
           <a:prstGeom prst="rect">
             <a:avLst/>
@@ -21409,13 +21986,18 @@
               </a:defRPr>
             </a:pPr>
             <a:r>
-              <a:rPr sz="900" b="1" i="0">
-                <a:solidFill>
-                  <a:srgbClr val="3B82F6"/>
-                </a:solidFill>
-              </a:rPr>
-              <a:t>CONCLUSIONS</a:t>
-            </a:r>
+              <a:rPr lang="en-US" sz="4000" b="1" i="0" dirty="0">
+                <a:solidFill>
+                  <a:srgbClr val="111827"/>
+                </a:solidFill>
+              </a:rPr>
+              <a:t>Conclusions </a:t>
+            </a:r>
+            <a:endParaRPr sz="4000" b="1" i="0" dirty="0">
+              <a:solidFill>
+                <a:srgbClr val="111827"/>
+              </a:solidFill>
+            </a:endParaRPr>
           </a:p>
         </p:txBody>
       </p:sp>
@@ -21435,8 +22017,8 @@
         </p:nvSpPr>
         <p:spPr>
           <a:xfrm>
-            <a:off x="609600" y="552450"/>
-            <a:ext cx="10953750" cy="666750"/>
+            <a:off x="609600" y="904874"/>
+            <a:ext cx="10953750" cy="485775"/>
           </a:xfrm>
           <a:prstGeom prst="rect">
             <a:avLst/>
@@ -21719,7 +22301,7 @@
         </p:nvSpPr>
         <p:spPr>
           <a:xfrm>
-            <a:off x="666750" y="2619375"/>
+            <a:off x="666750" y="2639254"/>
             <a:ext cx="10810875" cy="819150"/>
           </a:xfrm>
           <a:prstGeom prst="roundRect">
@@ -22362,11 +22944,9 @@
           </a:bodyPr>
           <a:lstStyle/>
           <a:p>
-            <a:pPr algn="ctr"/>
-            <a:r>
-              <a:rPr lang="en-US" dirty="0"/>
-              <a:t>Any</a:t>
-            </a:r>
+            <a:pPr marL="0" indent="0" algn="ctr">
+              <a:buNone/>
+            </a:pPr>
             <a:r>
               <a:rPr lang="en-US" dirty="0">
                 <a:solidFill>
@@ -22377,7 +22957,9 @@
             </a:r>
           </a:p>
           <a:p>
-            <a:pPr algn="ctr"/>
+            <a:pPr marL="0" indent="0" algn="ctr">
+              <a:buNone/>
+            </a:pPr>
             <a:r>
               <a:rPr lang="en-US" sz="3200" dirty="0">
                 <a:solidFill>
@@ -22445,8 +23027,8 @@
         </p:nvSpPr>
         <p:spPr>
           <a:xfrm>
-            <a:off x="609600" y="296053"/>
-            <a:ext cx="5715000" cy="228600"/>
+            <a:off x="609600" y="252153"/>
+            <a:ext cx="5715000" cy="394717"/>
           </a:xfrm>
           <a:prstGeom prst="rect">
             <a:avLst/>
@@ -22469,13 +23051,26 @@
               </a:defRPr>
             </a:pPr>
             <a:r>
-              <a:rPr sz="900" b="1" i="0" dirty="0">
-                <a:solidFill>
-                  <a:srgbClr val="3B82F6"/>
-                </a:solidFill>
-              </a:rPr>
-              <a:t>RESEARCH OBJECTIVES</a:t>
-            </a:r>
+              <a:rPr lang="en-US" sz="4000" b="1" i="0" dirty="0">
+                <a:solidFill>
+                  <a:srgbClr val="111827"/>
+                </a:solidFill>
+              </a:rPr>
+              <a:t>Objectives </a:t>
+            </a:r>
+            <a:r>
+              <a:rPr lang="en-US" sz="4000" dirty="0">
+                <a:solidFill>
+                  <a:srgbClr val="111827"/>
+                </a:solidFill>
+              </a:rPr>
+              <a:t>of the Study</a:t>
+            </a:r>
+            <a:endParaRPr sz="4000" b="1" i="0" dirty="0">
+              <a:solidFill>
+                <a:srgbClr val="111827"/>
+              </a:solidFill>
+            </a:endParaRPr>
           </a:p>
         </p:txBody>
       </p:sp>
@@ -22495,8 +23090,8 @@
         </p:nvSpPr>
         <p:spPr>
           <a:xfrm>
-            <a:off x="609600" y="552450"/>
-            <a:ext cx="10953750" cy="666750"/>
+            <a:off x="609600" y="895349"/>
+            <a:ext cx="10953750" cy="581025"/>
           </a:xfrm>
           <a:prstGeom prst="rect">
             <a:avLst/>
@@ -22545,7 +23140,7 @@
         </p:nvSpPr>
         <p:spPr>
           <a:xfrm>
-            <a:off x="666750" y="1476375"/>
+            <a:off x="666750" y="1496253"/>
             <a:ext cx="10810875" cy="838200"/>
           </a:xfrm>
           <a:prstGeom prst="roundRect">
@@ -22678,7 +23273,7 @@
         </p:nvSpPr>
         <p:spPr>
           <a:xfrm>
-            <a:off x="3238500" y="1619250"/>
+            <a:off x="3238500" y="1639129"/>
             <a:ext cx="7858125" cy="552450"/>
           </a:xfrm>
           <a:prstGeom prst="rect">
@@ -23126,8 +23721,8 @@
         </p:nvSpPr>
         <p:spPr>
           <a:xfrm>
-            <a:off x="666750" y="4676775"/>
-            <a:ext cx="10810875" cy="838200"/>
+            <a:off x="609600" y="4819649"/>
+            <a:ext cx="10868025" cy="695325"/>
           </a:xfrm>
           <a:prstGeom prst="roundRect">
             <a:avLst>
@@ -23399,8 +23994,8 @@
         </p:nvSpPr>
         <p:spPr>
           <a:xfrm>
-            <a:off x="609600" y="333375"/>
-            <a:ext cx="5715000" cy="228600"/>
+            <a:off x="609600" y="188841"/>
+            <a:ext cx="10045148" cy="837373"/>
           </a:xfrm>
           <a:prstGeom prst="rect">
             <a:avLst/>
@@ -23423,63 +24018,34 @@
               </a:defRPr>
             </a:pPr>
             <a:r>
-              <a:rPr sz="900" b="1" i="0">
-                <a:solidFill>
-                  <a:srgbClr val="3B82F6"/>
-                </a:solidFill>
-              </a:rPr>
-              <a:t>DEUTSCH–JOZSA PROBLEM</a:t>
-            </a:r>
-          </a:p>
-        </p:txBody>
-      </p:sp>
-      <p:sp>
-        <p:nvSpPr>
-          <p:cNvPr id="2" name="slide-title">
-            <a:extLst>
-              <a:ext uri="{FF2B5EF4-FFF2-40B4-BE49-F238E27FC236}">
-                <a16:creationId xmlns:a16="http://schemas.microsoft.com/office/drawing/2014/main" id="{04BB4C53-3905-441C-80FF-D8B67ADE8CDD}"/>
-              </a:ext>
-            </a:extLst>
-          </p:cNvPr>
-          <p:cNvSpPr>
-            <a:spLocks noGrp="1"/>
-          </p:cNvSpPr>
-          <p:nvPr/>
-        </p:nvSpPr>
-        <p:spPr>
-          <a:xfrm>
-            <a:off x="609600" y="552450"/>
-            <a:ext cx="10953750" cy="666750"/>
-          </a:xfrm>
-          <a:prstGeom prst="rect">
-            <a:avLst/>
-          </a:prstGeom>
-          <a:noFill/>
-          <a:ln w="0">
-            <a:noFill/>
-            <a:prstDash val="solid"/>
-          </a:ln>
-        </p:spPr>
-        <p:txBody>
-          <a:bodyPr anchor="ctr"/>
-          <a:lstStyle/>
-          <a:p>
-            <a:pPr algn="l">
-              <a:defRPr sz="2850" b="0" i="0">
-                <a:solidFill>
-                  <a:srgbClr val="111827"/>
-                </a:solidFill>
-              </a:defRPr>
-            </a:pPr>
-            <a:r>
-              <a:rPr sz="2850" b="0" i="0">
-                <a:solidFill>
-                  <a:srgbClr val="111827"/>
-                </a:solidFill>
-              </a:rPr>
-              <a:t>One promise problem reveals a query advantage</a:t>
-            </a:r>
+              <a:rPr lang="en-US" sz="4000" dirty="0">
+                <a:solidFill>
+                  <a:srgbClr val="111827"/>
+                </a:solidFill>
+              </a:rPr>
+              <a:t>The Deutsch–</a:t>
+            </a:r>
+            <a:r>
+              <a:rPr lang="en-US" sz="4000" dirty="0" err="1">
+                <a:solidFill>
+                  <a:srgbClr val="111827"/>
+                </a:solidFill>
+              </a:rPr>
+              <a:t>Jozsa</a:t>
+            </a:r>
+            <a:r>
+              <a:rPr lang="en-US" sz="4000" dirty="0">
+                <a:solidFill>
+                  <a:srgbClr val="111827"/>
+                </a:solidFill>
+              </a:rPr>
+              <a:t> Problem</a:t>
+            </a:r>
+            <a:endParaRPr sz="4000" b="1" i="0" dirty="0">
+              <a:solidFill>
+                <a:srgbClr val="111827"/>
+              </a:solidFill>
+            </a:endParaRPr>
           </a:p>
         </p:txBody>
       </p:sp>
@@ -23551,8 +24117,8 @@
         </p:nvSpPr>
         <p:spPr>
           <a:xfrm>
-            <a:off x="609600" y="2305050"/>
-            <a:ext cx="1428750" cy="342900"/>
+            <a:off x="609599" y="2305050"/>
+            <a:ext cx="2988365" cy="342900"/>
           </a:xfrm>
           <a:prstGeom prst="rect">
             <a:avLst/>
@@ -23575,13 +24141,14 @@
               </a:defRPr>
             </a:pPr>
             <a:r>
-              <a:rPr sz="1500" b="1" i="0">
-                <a:solidFill>
-                  <a:srgbClr val="5F6B7A"/>
-                </a:solidFill>
-              </a:rPr>
-              <a:t>Promise</a:t>
-            </a:r>
+              <a:rPr lang="en-US" sz="1600" dirty="0"/>
+              <a:t>Boolean Function </a:t>
+            </a:r>
+            <a:endParaRPr sz="1500" b="1" i="0" dirty="0">
+              <a:solidFill>
+                <a:srgbClr val="5F6B7A"/>
+              </a:solidFill>
+            </a:endParaRPr>
           </a:p>
         </p:txBody>
       </p:sp>
@@ -24152,12 +24719,12 @@
               </a:defRPr>
             </a:pPr>
             <a:r>
-              <a:rPr sz="1350" b="0" i="0">
-                <a:solidFill>
-                  <a:srgbClr val="111827"/>
-                </a:solidFill>
-              </a:rPr>
-              <a:t>Determine with certainty whether the promised function is constant or balanced.</a:t>
+              <a:rPr sz="1350" b="0" i="0" dirty="0">
+                <a:solidFill>
+                  <a:srgbClr val="111827"/>
+                </a:solidFill>
+              </a:rPr>
+              <a:t>Determine with certainty whether the  function is constant or balanced.</a:t>
             </a:r>
           </a:p>
         </p:txBody>
@@ -24266,8 +24833,8 @@
         </p:nvSpPr>
         <p:spPr>
           <a:xfrm>
-            <a:off x="609600" y="333375"/>
-            <a:ext cx="5715000" cy="228600"/>
+            <a:off x="609600" y="133350"/>
+            <a:ext cx="5715000" cy="512693"/>
           </a:xfrm>
           <a:prstGeom prst="rect">
             <a:avLst/>
@@ -24290,13 +24857,18 @@
               </a:defRPr>
             </a:pPr>
             <a:r>
-              <a:rPr sz="900" b="1" i="0">
-                <a:solidFill>
-                  <a:srgbClr val="3B82F6"/>
-                </a:solidFill>
-              </a:rPr>
-              <a:t>QUERY COMPLEXITY</a:t>
-            </a:r>
+              <a:rPr lang="en-US" sz="4000" dirty="0">
+                <a:solidFill>
+                  <a:srgbClr val="111827"/>
+                </a:solidFill>
+              </a:rPr>
+              <a:t>Continued…</a:t>
+            </a:r>
+            <a:endParaRPr sz="4000" b="1" i="0" dirty="0">
+              <a:solidFill>
+                <a:srgbClr val="111827"/>
+              </a:solidFill>
+            </a:endParaRPr>
           </a:p>
         </p:txBody>
       </p:sp>
@@ -24316,8 +24888,8 @@
         </p:nvSpPr>
         <p:spPr>
           <a:xfrm>
-            <a:off x="609600" y="552450"/>
-            <a:ext cx="10953750" cy="666750"/>
+            <a:off x="609600" y="646043"/>
+            <a:ext cx="10953750" cy="830331"/>
           </a:xfrm>
           <a:prstGeom prst="rect">
             <a:avLst/>
@@ -24340,7 +24912,7 @@
               </a:defRPr>
             </a:pPr>
             <a:r>
-              <a:rPr sz="2850" b="0" i="0">
+              <a:rPr sz="2850" b="0" i="0" dirty="0">
                 <a:solidFill>
                   <a:srgbClr val="111827"/>
                 </a:solidFill>
@@ -24416,7 +24988,7 @@
         </p:nvSpPr>
         <p:spPr>
           <a:xfrm>
-            <a:off x="400050" y="2020855"/>
+            <a:off x="400050" y="1976437"/>
             <a:ext cx="4762500" cy="2905125"/>
           </a:xfrm>
           <a:prstGeom prst="roundRect">
@@ -24954,8 +25526,8 @@
         </p:nvSpPr>
         <p:spPr>
           <a:xfrm>
-            <a:off x="609600" y="333375"/>
-            <a:ext cx="5715000" cy="228600"/>
+            <a:off x="609599" y="333374"/>
+            <a:ext cx="8723243" cy="571499"/>
           </a:xfrm>
           <a:prstGeom prst="rect">
             <a:avLst/>
@@ -24978,13 +25550,18 @@
               </a:defRPr>
             </a:pPr>
             <a:r>
-              <a:rPr sz="900" b="1" i="0">
-                <a:solidFill>
-                  <a:srgbClr val="3B82F6"/>
-                </a:solidFill>
-              </a:rPr>
-              <a:t>ORACLE REPRESENTATION</a:t>
-            </a:r>
+              <a:rPr lang="en-US" sz="4000" dirty="0">
+                <a:solidFill>
+                  <a:srgbClr val="111827"/>
+                </a:solidFill>
+              </a:rPr>
+              <a:t>Oracle Representation</a:t>
+            </a:r>
+            <a:endParaRPr sz="4000" b="1" i="0" dirty="0">
+              <a:solidFill>
+                <a:srgbClr val="111827"/>
+              </a:solidFill>
+            </a:endParaRPr>
           </a:p>
         </p:txBody>
       </p:sp>
@@ -25004,8 +25581,8 @@
         </p:nvSpPr>
         <p:spPr>
           <a:xfrm>
-            <a:off x="609600" y="552450"/>
-            <a:ext cx="10953750" cy="666750"/>
+            <a:off x="609599" y="940489"/>
+            <a:ext cx="10953750" cy="834473"/>
           </a:xfrm>
           <a:prstGeom prst="rect">
             <a:avLst/>
@@ -25120,8 +25697,8 @@
           </a:ln>
         </p:spPr>
       </p:sp>
-      <mc:AlternateContent xmlns:mc="http://schemas.openxmlformats.org/markup-compatibility/2006">
-        <mc:Choice xmlns:a14="http://schemas.microsoft.com/office/drawing/2010/main" Requires="a14">
+      <mc:AlternateContent xmlns:mc="http://schemas.openxmlformats.org/markup-compatibility/2006" xmlns:a14="http://schemas.microsoft.com/office/drawing/2010/main">
+        <mc:Choice Requires="a14">
           <p:sp>
             <p:nvSpPr>
               <p:cNvPr id="6" name="text">
@@ -25250,7 +25827,7 @@
             </p:txBody>
           </p:sp>
         </mc:Choice>
-        <mc:Fallback>
+        <mc:Fallback xmlns="">
           <p:sp>
             <p:nvSpPr>
               <p:cNvPr id="6" name="text">
@@ -25377,7 +25954,7 @@
         </p:blipFill>
         <p:spPr>
           <a:xfrm>
-            <a:off x="1031484" y="1736469"/>
+            <a:off x="1051362" y="2320413"/>
             <a:ext cx="9320911" cy="2918337"/>
           </a:xfrm>
           <a:prstGeom prst="rect">
@@ -25439,8 +26016,8 @@
         </p:nvSpPr>
         <p:spPr>
           <a:xfrm>
-            <a:off x="609600" y="333375"/>
-            <a:ext cx="5715000" cy="228600"/>
+            <a:off x="609600" y="313496"/>
+            <a:ext cx="9200322" cy="648529"/>
           </a:xfrm>
           <a:prstGeom prst="rect">
             <a:avLst/>
@@ -25462,14 +26039,60 @@
                 </a:solidFill>
               </a:defRPr>
             </a:pPr>
-            <a:r>
-              <a:rPr sz="900" b="1" i="0">
+            <a:br>
+              <a:rPr lang="en-US" sz="4000" b="1" dirty="0">
+                <a:solidFill>
+                  <a:srgbClr val="111111"/>
+                </a:solidFill>
+                <a:latin typeface="+mj-lt"/>
+                <a:cs typeface="Times New Roman" panose="02020603050405020304" pitchFamily="18" charset="0"/>
+              </a:rPr>
+            </a:br>
+            <a:r>
+              <a:rPr lang="en-US" sz="4000" dirty="0">
+                <a:solidFill>
+                  <a:srgbClr val="111827"/>
+                </a:solidFill>
+                <a:latin typeface="+mj-lt"/>
+                <a:cs typeface="Times New Roman" panose="02020603050405020304" pitchFamily="18" charset="0"/>
+              </a:rPr>
+              <a:t>Ideal Deutsch–</a:t>
+            </a:r>
+            <a:r>
+              <a:rPr lang="en-US" sz="4000" dirty="0" err="1">
+                <a:solidFill>
+                  <a:srgbClr val="111827"/>
+                </a:solidFill>
+                <a:latin typeface="+mj-lt"/>
+                <a:cs typeface="Times New Roman" panose="02020603050405020304" pitchFamily="18" charset="0"/>
+              </a:rPr>
+              <a:t>Jozsa</a:t>
+            </a:r>
+            <a:r>
+              <a:rPr lang="en-US" sz="4000" dirty="0">
+                <a:solidFill>
+                  <a:srgbClr val="111827"/>
+                </a:solidFill>
+                <a:latin typeface="+mj-lt"/>
+                <a:cs typeface="Times New Roman" panose="02020603050405020304" pitchFamily="18" charset="0"/>
+              </a:rPr>
+              <a:t> Circuit</a:t>
+            </a:r>
+            <a:br>
+              <a:rPr lang="en-US" sz="4000" b="1" dirty="0">
                 <a:solidFill>
                   <a:srgbClr val="3B82F6"/>
                 </a:solidFill>
-              </a:rPr>
-              <a:t>IDEAL DEUTSCH–JOZSA CIRCUIT</a:t>
-            </a:r>
+                <a:latin typeface="+mj-lt"/>
+                <a:cs typeface="Times New Roman" panose="02020603050405020304" pitchFamily="18" charset="0"/>
+              </a:rPr>
+            </a:br>
+            <a:endParaRPr sz="4000" b="1" i="0" dirty="0">
+              <a:solidFill>
+                <a:srgbClr val="3B82F6"/>
+              </a:solidFill>
+              <a:latin typeface="+mj-lt"/>
+            </a:endParaRPr>
           </a:p>
         </p:txBody>
       </p:sp>
@@ -25489,8 +26112,8 @@
         </p:nvSpPr>
         <p:spPr>
           <a:xfrm>
-            <a:off x="609600" y="552450"/>
-            <a:ext cx="10953750" cy="666750"/>
+            <a:off x="609600" y="1123950"/>
+            <a:ext cx="10953750" cy="857249"/>
           </a:xfrm>
           <a:prstGeom prst="rect">
             <a:avLst/>
@@ -25513,7 +26136,7 @@
               </a:defRPr>
             </a:pPr>
             <a:r>
-              <a:rPr sz="2850" b="0" i="0">
+              <a:rPr sz="2850" b="0" i="0" dirty="0">
                 <a:solidFill>
                   <a:srgbClr val="111827"/>
                 </a:solidFill>
@@ -25539,8 +26162,8 @@
         </p:nvSpPr>
         <p:spPr>
           <a:xfrm>
-            <a:off x="8667750" y="1600199"/>
-            <a:ext cx="3190875" cy="3381375"/>
+            <a:off x="8667750" y="1857375"/>
+            <a:ext cx="3190875" cy="3124199"/>
           </a:xfrm>
           <a:prstGeom prst="roundRect">
             <a:avLst>
@@ -26107,7 +26730,7 @@
         </p:blipFill>
         <p:spPr>
           <a:xfrm>
-            <a:off x="186612" y="1600200"/>
+            <a:off x="232584" y="1858203"/>
             <a:ext cx="8052319" cy="3381374"/>
           </a:xfrm>
           <a:prstGeom prst="rect">
@@ -26169,8 +26792,8 @@
         </p:nvSpPr>
         <p:spPr>
           <a:xfrm>
-            <a:off x="609600" y="333375"/>
-            <a:ext cx="5715000" cy="228600"/>
+            <a:off x="609600" y="313496"/>
+            <a:ext cx="8126896" cy="571085"/>
           </a:xfrm>
           <a:prstGeom prst="rect">
             <a:avLst/>
@@ -26193,13 +26816,90 @@
               </a:defRPr>
             </a:pPr>
             <a:r>
-              <a:rPr sz="900" b="1" i="0">
-                <a:solidFill>
-                  <a:srgbClr val="3B82F6"/>
-                </a:solidFill>
-              </a:rPr>
-              <a:t>HOW ONE QUERY IS DECODED</a:t>
-            </a:r>
+              <a:rPr sz="4000" b="1" i="0" dirty="0">
+                <a:solidFill>
+                  <a:srgbClr val="111827"/>
+                </a:solidFill>
+              </a:rPr>
+              <a:t>H</a:t>
+            </a:r>
+            <a:r>
+              <a:rPr lang="en-US" sz="4000" b="1" i="0" dirty="0">
+                <a:solidFill>
+                  <a:srgbClr val="111827"/>
+                </a:solidFill>
+              </a:rPr>
+              <a:t>ow</a:t>
+            </a:r>
+            <a:r>
+              <a:rPr sz="4000" b="1" i="0" dirty="0">
+                <a:solidFill>
+                  <a:srgbClr val="111827"/>
+                </a:solidFill>
+              </a:rPr>
+              <a:t> </a:t>
+            </a:r>
+            <a:r>
+              <a:rPr lang="en-US" sz="4000" b="1" dirty="0">
+                <a:solidFill>
+                  <a:srgbClr val="111827"/>
+                </a:solidFill>
+              </a:rPr>
+              <a:t>One</a:t>
+            </a:r>
+            <a:r>
+              <a:rPr sz="4000" b="1" i="0" dirty="0">
+                <a:solidFill>
+                  <a:srgbClr val="111827"/>
+                </a:solidFill>
+              </a:rPr>
+              <a:t> Q</a:t>
+            </a:r>
+            <a:r>
+              <a:rPr lang="en-US" sz="4000" b="1" i="0" dirty="0">
+                <a:solidFill>
+                  <a:srgbClr val="111827"/>
+                </a:solidFill>
+              </a:rPr>
+              <a:t>uery</a:t>
+            </a:r>
+            <a:r>
+              <a:rPr sz="4000" b="1" i="0" dirty="0">
+                <a:solidFill>
+                  <a:srgbClr val="111827"/>
+                </a:solidFill>
+              </a:rPr>
+              <a:t> </a:t>
+            </a:r>
+            <a:r>
+              <a:rPr lang="en-US" sz="4000" b="1" i="0" dirty="0">
+                <a:solidFill>
+                  <a:srgbClr val="111827"/>
+                </a:solidFill>
+              </a:rPr>
+              <a:t>is</a:t>
+            </a:r>
+            <a:r>
+              <a:rPr sz="4000" b="1" i="0" dirty="0">
+                <a:solidFill>
+                  <a:srgbClr val="111827"/>
+                </a:solidFill>
+              </a:rPr>
+              <a:t> D</a:t>
+            </a:r>
+            <a:r>
+              <a:rPr lang="en-US" sz="4000" b="1" i="0" dirty="0">
+                <a:solidFill>
+                  <a:srgbClr val="111827"/>
+                </a:solidFill>
+              </a:rPr>
+              <a:t>ecoded</a:t>
+            </a:r>
+            <a:endParaRPr sz="4000" b="1" i="0" dirty="0">
+              <a:solidFill>
+                <a:srgbClr val="111827"/>
+              </a:solidFill>
+            </a:endParaRPr>
           </a:p>
         </p:txBody>
       </p:sp>
@@ -26219,8 +26919,8 @@
         </p:nvSpPr>
         <p:spPr>
           <a:xfrm>
-            <a:off x="609600" y="552450"/>
-            <a:ext cx="10953750" cy="666750"/>
+            <a:off x="609600" y="884582"/>
+            <a:ext cx="10953750" cy="772767"/>
           </a:xfrm>
           <a:prstGeom prst="rect">
             <a:avLst/>
@@ -26703,7 +27403,7 @@
         </p:nvSpPr>
         <p:spPr>
           <a:xfrm>
-            <a:off x="6238875" y="1762125"/>
+            <a:off x="6238875" y="1782003"/>
             <a:ext cx="2381250" cy="2381250"/>
           </a:xfrm>
           <a:prstGeom prst="roundRect">
@@ -27374,8 +28074,8 @@
         </p:nvSpPr>
         <p:spPr>
           <a:xfrm>
-            <a:off x="609600" y="333375"/>
-            <a:ext cx="5715000" cy="228600"/>
+            <a:off x="609600" y="313497"/>
+            <a:ext cx="9130748" cy="533398"/>
           </a:xfrm>
           <a:prstGeom prst="rect">
             <a:avLst/>
@@ -27398,13 +28098,20 @@
               </a:defRPr>
             </a:pPr>
             <a:r>
-              <a:rPr sz="900" b="1" i="0">
-                <a:solidFill>
-                  <a:srgbClr val="3B82F6"/>
-                </a:solidFill>
-              </a:rPr>
-              <a:t>ROTATION-ERROR MODEL</a:t>
-            </a:r>
+              <a:rPr lang="en-US" sz="4000" b="1" i="0" dirty="0">
+                <a:solidFill>
+                  <a:srgbClr val="111827"/>
+                </a:solidFill>
+                <a:latin typeface="+mj-lt"/>
+              </a:rPr>
+              <a:t>Rotation-Axis</a:t>
+            </a:r>
+            <a:endParaRPr sz="4000" b="1" i="0" dirty="0">
+              <a:solidFill>
+                <a:srgbClr val="111827"/>
+              </a:solidFill>
+              <a:latin typeface="+mj-lt"/>
+            </a:endParaRPr>
           </a:p>
         </p:txBody>
       </p:sp>
@@ -27424,8 +28131,8 @@
         </p:nvSpPr>
         <p:spPr>
           <a:xfrm>
-            <a:off x="609600" y="552450"/>
-            <a:ext cx="10953750" cy="666750"/>
+            <a:off x="609600" y="1000953"/>
+            <a:ext cx="10953750" cy="533399"/>
           </a:xfrm>
           <a:prstGeom prst="rect">
             <a:avLst/>
@@ -27448,7 +28155,7 @@
               </a:defRPr>
             </a:pPr>
             <a:r>
-              <a:rPr sz="2850" b="0" i="0">
+              <a:rPr sz="2850" b="0" i="0" dirty="0">
                 <a:solidFill>
                   <a:srgbClr val="111827"/>
                 </a:solidFill>
@@ -27905,8 +28612,8 @@
           </a:ln>
         </p:spPr>
       </p:sp>
-      <mc:AlternateContent xmlns:mc="http://schemas.openxmlformats.org/markup-compatibility/2006">
-        <mc:Choice xmlns:a14="http://schemas.microsoft.com/office/drawing/2010/main" Requires="a14">
+      <mc:AlternateContent xmlns:mc="http://schemas.openxmlformats.org/markup-compatibility/2006" xmlns:a14="http://schemas.microsoft.com/office/drawing/2010/main">
+        <mc:Choice Requires="a14">
           <p:sp>
             <p:nvSpPr>
               <p:cNvPr id="12" name="text">
@@ -27951,7 +28658,7 @@
                     <m:sSub>
                       <m:sSubPr>
                         <m:ctrlPr>
-                          <a:rPr lang="ar-AE" sz="3150" b="1" smtClean="0">
+                          <a:rPr lang="ar-AE" sz="3150" b="1" i="1" smtClean="0">
                             <a:solidFill>
                               <a:srgbClr val="2E9E69"/>
                             </a:solidFill>
@@ -28018,7 +28725,7 @@
             </p:txBody>
           </p:sp>
         </mc:Choice>
-        <mc:Fallback>
+        <mc:Fallback xmlns="">
           <p:sp>
             <p:nvSpPr>
               <p:cNvPr id="12" name="text">
